--- a/Module_3_ Tram Nguyen _ KPMG virtual internship program.pptx
+++ b/Module_3_ Tram Nguyen _ KPMG virtual internship program.pptx
@@ -338,13 +338,276 @@
 <file path=ppt/revisionInfo.xml><?xml version="1.0" encoding="utf-8"?>
 <p1510:revInfo xmlns:a="http://schemas.openxmlformats.org/drawingml/2006/main" xmlns:r="http://schemas.openxmlformats.org/officeDocument/2006/relationships" xmlns:p1510="http://schemas.microsoft.com/office/powerpoint/2015/10/main">
   <p1510:revLst>
-    <p1510:client id="{8C97A672-958F-48F3-93AC-7850E738F628}" v="2" dt="2025-05-19T17:17:35.716"/>
+    <p1510:client id="{A462BB6E-54DA-4E88-A1F1-CD5D0829035B}" v="27" dt="2025-06-16T19:43:33.263"/>
   </p1510:revLst>
 </p1510:revInfo>
 </file>
 
 <file path=ppt/changesInfos/changesInfo1.xml><?xml version="1.0" encoding="utf-8"?>
 <pc:chgInfo xmlns:a="http://schemas.openxmlformats.org/drawingml/2006/main" xmlns:r="http://schemas.openxmlformats.org/officeDocument/2006/relationships" xmlns:ac="http://schemas.microsoft.com/office/drawing/2013/main/command" xmlns:pc="http://schemas.microsoft.com/office/powerpoint/2013/main/command">
+  <pc:docChgLst>
+    <pc:chgData name="Tram Nguyen" userId="51ee2127b6ac45fe" providerId="LiveId" clId="{A462BB6E-54DA-4E88-A1F1-CD5D0829035B}"/>
+    <pc:docChg chg="undo custSel modSld">
+      <pc:chgData name="Tram Nguyen" userId="51ee2127b6ac45fe" providerId="LiveId" clId="{A462BB6E-54DA-4E88-A1F1-CD5D0829035B}" dt="2025-06-16T19:43:24.104" v="58" actId="3626"/>
+      <pc:docMkLst>
+        <pc:docMk/>
+      </pc:docMkLst>
+      <pc:sldChg chg="modSp mod">
+        <pc:chgData name="Tram Nguyen" userId="51ee2127b6ac45fe" providerId="LiveId" clId="{A462BB6E-54DA-4E88-A1F1-CD5D0829035B}" dt="2025-06-16T19:43:24.104" v="58" actId="3626"/>
+        <pc:sldMkLst>
+          <pc:docMk/>
+          <pc:sldMk cId="0" sldId="262"/>
+        </pc:sldMkLst>
+        <pc:spChg chg="mod">
+          <ac:chgData name="Tram Nguyen" userId="51ee2127b6ac45fe" providerId="LiveId" clId="{A462BB6E-54DA-4E88-A1F1-CD5D0829035B}" dt="2025-06-16T19:43:24.104" v="58" actId="3626"/>
+          <ac:spMkLst>
+            <pc:docMk/>
+            <pc:sldMk cId="0" sldId="262"/>
+            <ac:spMk id="2" creationId="{763B28E2-2434-DDE7-A3D0-02D3B71F2719}"/>
+          </ac:spMkLst>
+        </pc:spChg>
+      </pc:sldChg>
+      <pc:sldChg chg="addSp delSp modSp mod">
+        <pc:chgData name="Tram Nguyen" userId="51ee2127b6ac45fe" providerId="LiveId" clId="{A462BB6E-54DA-4E88-A1F1-CD5D0829035B}" dt="2025-06-16T19:35:07.093" v="56" actId="1076"/>
+        <pc:sldMkLst>
+          <pc:docMk/>
+          <pc:sldMk cId="4230813169" sldId="269"/>
+        </pc:sldMkLst>
+        <pc:spChg chg="add del mod">
+          <ac:chgData name="Tram Nguyen" userId="51ee2127b6ac45fe" providerId="LiveId" clId="{A462BB6E-54DA-4E88-A1F1-CD5D0829035B}" dt="2025-06-16T19:31:27.012" v="16" actId="47"/>
+          <ac:spMkLst>
+            <pc:docMk/>
+            <pc:sldMk cId="4230813169" sldId="269"/>
+            <ac:spMk id="5" creationId="{061D3F61-7128-4F48-CE1C-267B509A51CD}"/>
+          </ac:spMkLst>
+        </pc:spChg>
+        <pc:spChg chg="add del mod">
+          <ac:chgData name="Tram Nguyen" userId="51ee2127b6ac45fe" providerId="LiveId" clId="{A462BB6E-54DA-4E88-A1F1-CD5D0829035B}" dt="2025-06-16T19:34:18.018" v="46" actId="478"/>
+          <ac:spMkLst>
+            <pc:docMk/>
+            <pc:sldMk cId="4230813169" sldId="269"/>
+            <ac:spMk id="6" creationId="{F4BD6310-0FD4-9308-1389-8373B3E77B3B}"/>
+          </ac:spMkLst>
+        </pc:spChg>
+        <pc:spChg chg="add mod">
+          <ac:chgData name="Tram Nguyen" userId="51ee2127b6ac45fe" providerId="LiveId" clId="{A462BB6E-54DA-4E88-A1F1-CD5D0829035B}" dt="2025-06-16T19:31:28.588" v="19"/>
+          <ac:spMkLst>
+            <pc:docMk/>
+            <pc:sldMk cId="4230813169" sldId="269"/>
+            <ac:spMk id="8" creationId="{9EAC8C60-F13F-9167-9F8B-B44CA2DC4D71}"/>
+          </ac:spMkLst>
+        </pc:spChg>
+        <pc:spChg chg="add mod">
+          <ac:chgData name="Tram Nguyen" userId="51ee2127b6ac45fe" providerId="LiveId" clId="{A462BB6E-54DA-4E88-A1F1-CD5D0829035B}" dt="2025-06-16T19:31:28.588" v="19"/>
+          <ac:spMkLst>
+            <pc:docMk/>
+            <pc:sldMk cId="4230813169" sldId="269"/>
+            <ac:spMk id="9" creationId="{74066AAC-F637-3FE3-48BD-B5BD9203DE2E}"/>
+          </ac:spMkLst>
+        </pc:spChg>
+        <pc:spChg chg="add mod">
+          <ac:chgData name="Tram Nguyen" userId="51ee2127b6ac45fe" providerId="LiveId" clId="{A462BB6E-54DA-4E88-A1F1-CD5D0829035B}" dt="2025-06-16T19:31:28.588" v="19"/>
+          <ac:spMkLst>
+            <pc:docMk/>
+            <pc:sldMk cId="4230813169" sldId="269"/>
+            <ac:spMk id="10" creationId="{70757515-D501-3299-BBAD-40263AA96B4A}"/>
+          </ac:spMkLst>
+        </pc:spChg>
+        <pc:spChg chg="add mod">
+          <ac:chgData name="Tram Nguyen" userId="51ee2127b6ac45fe" providerId="LiveId" clId="{A462BB6E-54DA-4E88-A1F1-CD5D0829035B}" dt="2025-06-16T19:31:28.059" v="18"/>
+          <ac:spMkLst>
+            <pc:docMk/>
+            <pc:sldMk cId="4230813169" sldId="269"/>
+            <ac:spMk id="12" creationId="{855C9F73-A5C4-7279-21D6-A19704DCF177}"/>
+          </ac:spMkLst>
+        </pc:spChg>
+        <pc:spChg chg="add mod">
+          <ac:chgData name="Tram Nguyen" userId="51ee2127b6ac45fe" providerId="LiveId" clId="{A462BB6E-54DA-4E88-A1F1-CD5D0829035B}" dt="2025-06-16T19:31:28.059" v="18"/>
+          <ac:spMkLst>
+            <pc:docMk/>
+            <pc:sldMk cId="4230813169" sldId="269"/>
+            <ac:spMk id="13" creationId="{134678CB-651E-F017-0753-612AEBEDE89E}"/>
+          </ac:spMkLst>
+        </pc:spChg>
+        <pc:spChg chg="add mod">
+          <ac:chgData name="Tram Nguyen" userId="51ee2127b6ac45fe" providerId="LiveId" clId="{A462BB6E-54DA-4E88-A1F1-CD5D0829035B}" dt="2025-06-16T19:31:28.059" v="18"/>
+          <ac:spMkLst>
+            <pc:docMk/>
+            <pc:sldMk cId="4230813169" sldId="269"/>
+            <ac:spMk id="14" creationId="{30523E37-3BFA-B7E8-8506-19B25F5139B0}"/>
+          </ac:spMkLst>
+        </pc:spChg>
+        <pc:spChg chg="add mod">
+          <ac:chgData name="Tram Nguyen" userId="51ee2127b6ac45fe" providerId="LiveId" clId="{A462BB6E-54DA-4E88-A1F1-CD5D0829035B}" dt="2025-06-16T19:31:27.547" v="17"/>
+          <ac:spMkLst>
+            <pc:docMk/>
+            <pc:sldMk cId="4230813169" sldId="269"/>
+            <ac:spMk id="16" creationId="{272BAB2A-3054-2225-1E8F-16395E4546E1}"/>
+          </ac:spMkLst>
+        </pc:spChg>
+        <pc:spChg chg="add mod">
+          <ac:chgData name="Tram Nguyen" userId="51ee2127b6ac45fe" providerId="LiveId" clId="{A462BB6E-54DA-4E88-A1F1-CD5D0829035B}" dt="2025-06-16T19:31:27.547" v="17"/>
+          <ac:spMkLst>
+            <pc:docMk/>
+            <pc:sldMk cId="4230813169" sldId="269"/>
+            <ac:spMk id="17" creationId="{3FDE506C-E3DE-FA9C-C1AF-EC4B4DFC9988}"/>
+          </ac:spMkLst>
+        </pc:spChg>
+        <pc:spChg chg="add mod">
+          <ac:chgData name="Tram Nguyen" userId="51ee2127b6ac45fe" providerId="LiveId" clId="{A462BB6E-54DA-4E88-A1F1-CD5D0829035B}" dt="2025-06-16T19:31:27.547" v="17"/>
+          <ac:spMkLst>
+            <pc:docMk/>
+            <pc:sldMk cId="4230813169" sldId="269"/>
+            <ac:spMk id="18" creationId="{86D3D52A-5891-92F3-C014-72FCDE14E53E}"/>
+          </ac:spMkLst>
+        </pc:spChg>
+        <pc:spChg chg="add mod">
+          <ac:chgData name="Tram Nguyen" userId="51ee2127b6ac45fe" providerId="LiveId" clId="{A462BB6E-54DA-4E88-A1F1-CD5D0829035B}" dt="2025-06-16T19:31:26.356" v="13"/>
+          <ac:spMkLst>
+            <pc:docMk/>
+            <pc:sldMk cId="4230813169" sldId="269"/>
+            <ac:spMk id="20" creationId="{CE28E34A-AF0F-1623-6122-60EE4B6D3A81}"/>
+          </ac:spMkLst>
+        </pc:spChg>
+        <pc:spChg chg="add mod">
+          <ac:chgData name="Tram Nguyen" userId="51ee2127b6ac45fe" providerId="LiveId" clId="{A462BB6E-54DA-4E88-A1F1-CD5D0829035B}" dt="2025-06-16T19:31:26.356" v="13"/>
+          <ac:spMkLst>
+            <pc:docMk/>
+            <pc:sldMk cId="4230813169" sldId="269"/>
+            <ac:spMk id="21" creationId="{008C48D7-E87F-83C2-87C4-3B284D6AB7ED}"/>
+          </ac:spMkLst>
+        </pc:spChg>
+        <pc:spChg chg="add mod">
+          <ac:chgData name="Tram Nguyen" userId="51ee2127b6ac45fe" providerId="LiveId" clId="{A462BB6E-54DA-4E88-A1F1-CD5D0829035B}" dt="2025-06-16T19:31:26.356" v="13"/>
+          <ac:spMkLst>
+            <pc:docMk/>
+            <pc:sldMk cId="4230813169" sldId="269"/>
+            <ac:spMk id="22" creationId="{5636C186-59D3-3076-1432-B8497684E105}"/>
+          </ac:spMkLst>
+        </pc:spChg>
+        <pc:spChg chg="add mod">
+          <ac:chgData name="Tram Nguyen" userId="51ee2127b6ac45fe" providerId="LiveId" clId="{A462BB6E-54DA-4E88-A1F1-CD5D0829035B}" dt="2025-06-16T19:31:54.207" v="24" actId="1076"/>
+          <ac:spMkLst>
+            <pc:docMk/>
+            <pc:sldMk cId="4230813169" sldId="269"/>
+            <ac:spMk id="24" creationId="{77A639EA-5B98-86D9-3A15-D9791D9BD5B0}"/>
+          </ac:spMkLst>
+        </pc:spChg>
+        <pc:spChg chg="add mod">
+          <ac:chgData name="Tram Nguyen" userId="51ee2127b6ac45fe" providerId="LiveId" clId="{A462BB6E-54DA-4E88-A1F1-CD5D0829035B}" dt="2025-06-16T19:32:21.702" v="30" actId="1076"/>
+          <ac:spMkLst>
+            <pc:docMk/>
+            <pc:sldMk cId="4230813169" sldId="269"/>
+            <ac:spMk id="26" creationId="{8482C798-0E26-D9BB-825A-DE8009ECC61B}"/>
+          </ac:spMkLst>
+        </pc:spChg>
+        <pc:spChg chg="add mod">
+          <ac:chgData name="Tram Nguyen" userId="51ee2127b6ac45fe" providerId="LiveId" clId="{A462BB6E-54DA-4E88-A1F1-CD5D0829035B}" dt="2025-06-16T19:34:12.747" v="45" actId="1076"/>
+          <ac:spMkLst>
+            <pc:docMk/>
+            <pc:sldMk cId="4230813169" sldId="269"/>
+            <ac:spMk id="27" creationId="{0AD26FD8-6C0A-D583-BF01-206FDE4899EA}"/>
+          </ac:spMkLst>
+        </pc:spChg>
+        <pc:spChg chg="add mod">
+          <ac:chgData name="Tram Nguyen" userId="51ee2127b6ac45fe" providerId="LiveId" clId="{A462BB6E-54DA-4E88-A1F1-CD5D0829035B}" dt="2025-06-16T19:34:12.747" v="45" actId="1076"/>
+          <ac:spMkLst>
+            <pc:docMk/>
+            <pc:sldMk cId="4230813169" sldId="269"/>
+            <ac:spMk id="28" creationId="{82493DED-3579-E9CC-E059-5B0E072D5418}"/>
+          </ac:spMkLst>
+        </pc:spChg>
+        <pc:spChg chg="add mod">
+          <ac:chgData name="Tram Nguyen" userId="51ee2127b6ac45fe" providerId="LiveId" clId="{A462BB6E-54DA-4E88-A1F1-CD5D0829035B}" dt="2025-06-16T19:34:12.747" v="45" actId="1076"/>
+          <ac:spMkLst>
+            <pc:docMk/>
+            <pc:sldMk cId="4230813169" sldId="269"/>
+            <ac:spMk id="29" creationId="{4A6BAA00-FE8B-7881-0DF4-B1D3C4EF2347}"/>
+          </ac:spMkLst>
+        </pc:spChg>
+        <pc:spChg chg="add mod">
+          <ac:chgData name="Tram Nguyen" userId="51ee2127b6ac45fe" providerId="LiveId" clId="{A462BB6E-54DA-4E88-A1F1-CD5D0829035B}" dt="2025-06-16T19:35:03.505" v="55" actId="1076"/>
+          <ac:spMkLst>
+            <pc:docMk/>
+            <pc:sldMk cId="4230813169" sldId="269"/>
+            <ac:spMk id="30" creationId="{3ADDAF95-99D9-F036-1189-08677EDAF722}"/>
+          </ac:spMkLst>
+        </pc:spChg>
+        <pc:spChg chg="add del mod">
+          <ac:chgData name="Tram Nguyen" userId="51ee2127b6ac45fe" providerId="LiveId" clId="{A462BB6E-54DA-4E88-A1F1-CD5D0829035B}" dt="2025-06-16T19:34:51.335" v="52" actId="478"/>
+          <ac:spMkLst>
+            <pc:docMk/>
+            <pc:sldMk cId="4230813169" sldId="269"/>
+            <ac:spMk id="31" creationId="{E266F2A4-0BA4-0C6C-5B50-921996B07483}"/>
+          </ac:spMkLst>
+        </pc:spChg>
+        <pc:spChg chg="add mod">
+          <ac:chgData name="Tram Nguyen" userId="51ee2127b6ac45fe" providerId="LiveId" clId="{A462BB6E-54DA-4E88-A1F1-CD5D0829035B}" dt="2025-06-16T19:35:07.093" v="56" actId="1076"/>
+          <ac:spMkLst>
+            <pc:docMk/>
+            <pc:sldMk cId="4230813169" sldId="269"/>
+            <ac:spMk id="128" creationId="{E48602A8-8E13-D4B9-3B5E-59E12A34C057}"/>
+          </ac:spMkLst>
+        </pc:spChg>
+        <pc:graphicFrameChg chg="add mod">
+          <ac:chgData name="Tram Nguyen" userId="51ee2127b6ac45fe" providerId="LiveId" clId="{A462BB6E-54DA-4E88-A1F1-CD5D0829035B}" dt="2025-06-16T19:31:17.187" v="9"/>
+          <ac:graphicFrameMkLst>
+            <pc:docMk/>
+            <pc:sldMk cId="4230813169" sldId="269"/>
+            <ac:graphicFrameMk id="7" creationId="{522D1DBB-1244-15B6-95FF-4059CD48375D}"/>
+          </ac:graphicFrameMkLst>
+        </pc:graphicFrameChg>
+        <pc:graphicFrameChg chg="add mod">
+          <ac:chgData name="Tram Nguyen" userId="51ee2127b6ac45fe" providerId="LiveId" clId="{A462BB6E-54DA-4E88-A1F1-CD5D0829035B}" dt="2025-06-16T19:31:22.532" v="10"/>
+          <ac:graphicFrameMkLst>
+            <pc:docMk/>
+            <pc:sldMk cId="4230813169" sldId="269"/>
+            <ac:graphicFrameMk id="11" creationId="{850541FF-4FEB-57C3-B97F-4C94D3F523CA}"/>
+          </ac:graphicFrameMkLst>
+        </pc:graphicFrameChg>
+        <pc:graphicFrameChg chg="add mod">
+          <ac:chgData name="Tram Nguyen" userId="51ee2127b6ac45fe" providerId="LiveId" clId="{A462BB6E-54DA-4E88-A1F1-CD5D0829035B}" dt="2025-06-16T19:31:23.151" v="11"/>
+          <ac:graphicFrameMkLst>
+            <pc:docMk/>
+            <pc:sldMk cId="4230813169" sldId="269"/>
+            <ac:graphicFrameMk id="15" creationId="{A23194D7-240D-00F5-F47A-5BC0722F251F}"/>
+          </ac:graphicFrameMkLst>
+        </pc:graphicFrameChg>
+        <pc:graphicFrameChg chg="add mod">
+          <ac:chgData name="Tram Nguyen" userId="51ee2127b6ac45fe" providerId="LiveId" clId="{A462BB6E-54DA-4E88-A1F1-CD5D0829035B}" dt="2025-06-16T19:31:23.689" v="12"/>
+          <ac:graphicFrameMkLst>
+            <pc:docMk/>
+            <pc:sldMk cId="4230813169" sldId="269"/>
+            <ac:graphicFrameMk id="19" creationId="{8357BA6D-B678-8887-948F-AEF24CF977FB}"/>
+          </ac:graphicFrameMkLst>
+        </pc:graphicFrameChg>
+        <pc:graphicFrameChg chg="add mod modGraphic">
+          <ac:chgData name="Tram Nguyen" userId="51ee2127b6ac45fe" providerId="LiveId" clId="{A462BB6E-54DA-4E88-A1F1-CD5D0829035B}" dt="2025-06-16T19:32:46.071" v="38" actId="122"/>
+          <ac:graphicFrameMkLst>
+            <pc:docMk/>
+            <pc:sldMk cId="4230813169" sldId="269"/>
+            <ac:graphicFrameMk id="25" creationId="{63DA96F4-1C48-6589-A155-10E9852AAAB1}"/>
+          </ac:graphicFrameMkLst>
+        </pc:graphicFrameChg>
+        <pc:picChg chg="del">
+          <ac:chgData name="Tram Nguyen" userId="51ee2127b6ac45fe" providerId="LiveId" clId="{A462BB6E-54DA-4E88-A1F1-CD5D0829035B}" dt="2025-06-16T19:30:09.075" v="0" actId="478"/>
+          <ac:picMkLst>
+            <pc:docMk/>
+            <pc:sldMk cId="4230813169" sldId="269"/>
+            <ac:picMk id="3" creationId="{BA6863F9-E687-CBAC-322A-AB5F53B3D68A}"/>
+          </ac:picMkLst>
+        </pc:picChg>
+        <pc:picChg chg="add mod">
+          <ac:chgData name="Tram Nguyen" userId="51ee2127b6ac45fe" providerId="LiveId" clId="{A462BB6E-54DA-4E88-A1F1-CD5D0829035B}" dt="2025-06-16T19:35:00.410" v="54" actId="1076"/>
+          <ac:picMkLst>
+            <pc:docMk/>
+            <pc:sldMk cId="4230813169" sldId="269"/>
+            <ac:picMk id="4" creationId="{6660982A-8565-B1C5-B084-EE7AB6158114}"/>
+          </ac:picMkLst>
+        </pc:picChg>
+      </pc:sldChg>
+    </pc:docChg>
+  </pc:docChgLst>
   <pc:docChgLst>
     <pc:chgData name="Tram Nguyen" userId="51ee2127b6ac45fe" providerId="LiveId" clId="{D4FBFE9B-6850-415E-A7C1-9F87F8C915C0}"/>
     <pc:docChg chg="undo custSel addSld delSld modSld sldOrd">
@@ -633,14 +896,6 @@
             <ac:spMk id="5" creationId="{061D3F61-7128-4F48-CE1C-267B509A51CD}"/>
           </ac:spMkLst>
         </pc:spChg>
-        <pc:spChg chg="add mod">
-          <ac:chgData name="Tram Nguyen" userId="51ee2127b6ac45fe" providerId="LiveId" clId="{D4FBFE9B-6850-415E-A7C1-9F87F8C915C0}" dt="2025-05-04T13:11:32.528" v="882" actId="13926"/>
-          <ac:spMkLst>
-            <pc:docMk/>
-            <pc:sldMk cId="4230813169" sldId="269"/>
-            <ac:spMk id="6" creationId="{F4BD6310-0FD4-9308-1389-8373B3E77B3B}"/>
-          </ac:spMkLst>
-        </pc:spChg>
         <pc:spChg chg="mod">
           <ac:chgData name="Tram Nguyen" userId="51ee2127b6ac45fe" providerId="LiveId" clId="{D4FBFE9B-6850-415E-A7C1-9F87F8C915C0}" dt="2025-05-04T13:17:20.996" v="921" actId="20577"/>
           <ac:spMkLst>
@@ -649,14 +904,6 @@
             <ac:spMk id="130" creationId="{9095BB32-799F-64DE-B2B9-4ABA1A0D5AC0}"/>
           </ac:spMkLst>
         </pc:spChg>
-        <pc:picChg chg="add mod">
-          <ac:chgData name="Tram Nguyen" userId="51ee2127b6ac45fe" providerId="LiveId" clId="{D4FBFE9B-6850-415E-A7C1-9F87F8C915C0}" dt="2025-05-04T12:23:17.256" v="447" actId="1076"/>
-          <ac:picMkLst>
-            <pc:docMk/>
-            <pc:sldMk cId="4230813169" sldId="269"/>
-            <ac:picMk id="3" creationId="{BA6863F9-E687-CBAC-322A-AB5F53B3D68A}"/>
-          </ac:picMkLst>
-        </pc:picChg>
       </pc:sldChg>
       <pc:sldChg chg="addSp delSp modSp add mod ord chgLayout">
         <pc:chgData name="Tram Nguyen" userId="51ee2127b6ac45fe" providerId="LiveId" clId="{D4FBFE9B-6850-415E-A7C1-9F87F8C915C0}" dt="2025-05-04T13:16:47.253" v="897"/>
@@ -2695,7 +2942,7 @@
           </a:ln>
           <a:extLst>
             <a:ext uri="{C572A759-6A51-4108-AA02-DFA0A04FC94B}">
-              <ma14:wrappingTextBoxFlag xmlns="" xmlns:ma14="http://schemas.microsoft.com/office/mac/drawingml/2011/main" val="1"/>
+              <ma14:wrappingTextBoxFlag xmlns:ma14="http://schemas.microsoft.com/office/mac/drawingml/2011/main" xmlns="" val="1"/>
             </a:ext>
           </a:extLst>
         </p:spPr>
@@ -2734,7 +2981,7 @@
           </a:ln>
           <a:extLst>
             <a:ext uri="{C572A759-6A51-4108-AA02-DFA0A04FC94B}">
-              <ma14:wrappingTextBoxFlag xmlns="" xmlns:ma14="http://schemas.microsoft.com/office/mac/drawingml/2011/main" val="1"/>
+              <ma14:wrappingTextBoxFlag xmlns:ma14="http://schemas.microsoft.com/office/mac/drawingml/2011/main" xmlns="" val="1"/>
             </a:ext>
           </a:extLst>
         </p:spPr>
@@ -3794,7 +4041,7 @@
           </a:ln>
           <a:extLst>
             <a:ext uri="{C572A759-6A51-4108-AA02-DFA0A04FC94B}">
-              <ma14:wrappingTextBoxFlag xmlns="" xmlns:ma14="http://schemas.microsoft.com/office/mac/drawingml/2011/main" val="1"/>
+              <ma14:wrappingTextBoxFlag xmlns:ma14="http://schemas.microsoft.com/office/mac/drawingml/2011/main" xmlns="" val="1"/>
             </a:ext>
           </a:extLst>
         </p:spPr>
@@ -3842,7 +4089,7 @@
           </a:ln>
           <a:extLst>
             <a:ext uri="{C572A759-6A51-4108-AA02-DFA0A04FC94B}">
-              <ma14:wrappingTextBoxFlag xmlns="" xmlns:ma14="http://schemas.microsoft.com/office/mac/drawingml/2011/main" val="1"/>
+              <ma14:wrappingTextBoxFlag xmlns:ma14="http://schemas.microsoft.com/office/mac/drawingml/2011/main" xmlns="" val="1"/>
             </a:ext>
           </a:extLst>
         </p:spPr>
@@ -3917,7 +4164,7 @@
           </a:ln>
           <a:extLst>
             <a:ext uri="{C572A759-6A51-4108-AA02-DFA0A04FC94B}">
-              <ma14:wrappingTextBoxFlag xmlns="" xmlns:ma14="http://schemas.microsoft.com/office/mac/drawingml/2011/main" val="1"/>
+              <ma14:wrappingTextBoxFlag xmlns:ma14="http://schemas.microsoft.com/office/mac/drawingml/2011/main" xmlns="" val="1"/>
             </a:ext>
           </a:extLst>
         </p:spPr>
@@ -3969,7 +4216,7 @@
           </a:ln>
           <a:extLst>
             <a:ext uri="{C572A759-6A51-4108-AA02-DFA0A04FC94B}">
-              <ma14:wrappingTextBoxFlag xmlns="" xmlns:ma14="http://schemas.microsoft.com/office/mac/drawingml/2011/main" val="1"/>
+              <ma14:wrappingTextBoxFlag xmlns:ma14="http://schemas.microsoft.com/office/mac/drawingml/2011/main" xmlns="" val="1"/>
             </a:ext>
           </a:extLst>
         </p:spPr>
@@ -4095,7 +4342,7 @@
           </a:ln>
           <a:extLst>
             <a:ext uri="{C572A759-6A51-4108-AA02-DFA0A04FC94B}">
-              <ma14:wrappingTextBoxFlag xmlns="" xmlns:ma14="http://schemas.microsoft.com/office/mac/drawingml/2011/main" val="1"/>
+              <ma14:wrappingTextBoxFlag xmlns:ma14="http://schemas.microsoft.com/office/mac/drawingml/2011/main" xmlns="" val="1"/>
             </a:ext>
           </a:extLst>
         </p:spPr>
@@ -4151,7 +4398,7 @@
           </a:ln>
           <a:extLst>
             <a:ext uri="{C572A759-6A51-4108-AA02-DFA0A04FC94B}">
-              <ma14:wrappingTextBoxFlag xmlns="" xmlns:ma14="http://schemas.microsoft.com/office/mac/drawingml/2011/main" val="1"/>
+              <ma14:wrappingTextBoxFlag xmlns:ma14="http://schemas.microsoft.com/office/mac/drawingml/2011/main" xmlns="" val="1"/>
             </a:ext>
           </a:extLst>
         </p:spPr>
@@ -4209,7 +4456,7 @@
           </a:ln>
           <a:extLst>
             <a:ext uri="{C572A759-6A51-4108-AA02-DFA0A04FC94B}">
-              <ma14:wrappingTextBoxFlag xmlns="" xmlns:ma14="http://schemas.microsoft.com/office/mac/drawingml/2011/main" val="1"/>
+              <ma14:wrappingTextBoxFlag xmlns:ma14="http://schemas.microsoft.com/office/mac/drawingml/2011/main" xmlns="" val="1"/>
             </a:ext>
           </a:extLst>
         </p:spPr>
@@ -5135,7 +5382,7 @@
           </a:ln>
           <a:extLst>
             <a:ext uri="{C572A759-6A51-4108-AA02-DFA0A04FC94B}">
-              <ma14:wrappingTextBoxFlag xmlns:ma14="http://schemas.microsoft.com/office/mac/drawingml/2011/main" xmlns="" val="1"/>
+              <ma14:wrappingTextBoxFlag xmlns="" xmlns:ma14="http://schemas.microsoft.com/office/mac/drawingml/2011/main" val="1"/>
             </a:ext>
           </a:extLst>
         </p:spPr>
@@ -5191,7 +5438,7 @@
           </a:ln>
           <a:extLst>
             <a:ext uri="{C572A759-6A51-4108-AA02-DFA0A04FC94B}">
-              <ma14:wrappingTextBoxFlag xmlns:ma14="http://schemas.microsoft.com/office/mac/drawingml/2011/main" xmlns="" val="1"/>
+              <ma14:wrappingTextBoxFlag xmlns="" xmlns:ma14="http://schemas.microsoft.com/office/mac/drawingml/2011/main" val="1"/>
             </a:ext>
           </a:extLst>
         </p:spPr>
@@ -5249,7 +5496,7 @@
           </a:ln>
           <a:extLst>
             <a:ext uri="{C572A759-6A51-4108-AA02-DFA0A04FC94B}">
-              <ma14:wrappingTextBoxFlag xmlns:ma14="http://schemas.microsoft.com/office/mac/drawingml/2011/main" xmlns="" val="1"/>
+              <ma14:wrappingTextBoxFlag xmlns="" xmlns:ma14="http://schemas.microsoft.com/office/mac/drawingml/2011/main" val="1"/>
             </a:ext>
           </a:extLst>
         </p:spPr>
@@ -5737,7 +5984,7 @@
           </a:ln>
           <a:extLst>
             <a:ext uri="{C572A759-6A51-4108-AA02-DFA0A04FC94B}">
-              <ma14:wrappingTextBoxFlag xmlns="" xmlns:ma14="http://schemas.microsoft.com/office/mac/drawingml/2011/main" val="1"/>
+              <ma14:wrappingTextBoxFlag xmlns:ma14="http://schemas.microsoft.com/office/mac/drawingml/2011/main" xmlns="" val="1"/>
             </a:ext>
           </a:extLst>
         </p:spPr>
@@ -5799,7 +6046,7 @@
           </a:ln>
           <a:extLst>
             <a:ext uri="{C572A759-6A51-4108-AA02-DFA0A04FC94B}">
-              <ma14:wrappingTextBoxFlag xmlns="" xmlns:ma14="http://schemas.microsoft.com/office/mac/drawingml/2011/main" val="1"/>
+              <ma14:wrappingTextBoxFlag xmlns:ma14="http://schemas.microsoft.com/office/mac/drawingml/2011/main" xmlns="" val="1"/>
             </a:ext>
           </a:extLst>
         </p:spPr>
@@ -5857,7 +6104,7 @@
           </a:ln>
           <a:extLst>
             <a:ext uri="{C572A759-6A51-4108-AA02-DFA0A04FC94B}">
-              <ma14:wrappingTextBoxFlag xmlns="" xmlns:ma14="http://schemas.microsoft.com/office/mac/drawingml/2011/main" val="1"/>
+              <ma14:wrappingTextBoxFlag xmlns:ma14="http://schemas.microsoft.com/office/mac/drawingml/2011/main" xmlns="" val="1"/>
             </a:ext>
           </a:extLst>
         </p:spPr>
@@ -6342,7 +6589,7 @@
           </a:ln>
           <a:extLst>
             <a:ext uri="{C572A759-6A51-4108-AA02-DFA0A04FC94B}">
-              <ma14:wrappingTextBoxFlag xmlns="" xmlns:ma14="http://schemas.microsoft.com/office/mac/drawingml/2011/main" val="1"/>
+              <ma14:wrappingTextBoxFlag xmlns:ma14="http://schemas.microsoft.com/office/mac/drawingml/2011/main" xmlns="" val="1"/>
             </a:ext>
           </a:extLst>
         </p:spPr>
@@ -6398,7 +6645,7 @@
           </a:ln>
           <a:extLst>
             <a:ext uri="{C572A759-6A51-4108-AA02-DFA0A04FC94B}">
-              <ma14:wrappingTextBoxFlag xmlns="" xmlns:ma14="http://schemas.microsoft.com/office/mac/drawingml/2011/main" val="1"/>
+              <ma14:wrappingTextBoxFlag xmlns:ma14="http://schemas.microsoft.com/office/mac/drawingml/2011/main" xmlns="" val="1"/>
             </a:ext>
           </a:extLst>
         </p:spPr>
@@ -6456,7 +6703,7 @@
           </a:ln>
           <a:extLst>
             <a:ext uri="{C572A759-6A51-4108-AA02-DFA0A04FC94B}">
-              <ma14:wrappingTextBoxFlag xmlns="" xmlns:ma14="http://schemas.microsoft.com/office/mac/drawingml/2011/main" val="1"/>
+              <ma14:wrappingTextBoxFlag xmlns:ma14="http://schemas.microsoft.com/office/mac/drawingml/2011/main" xmlns="" val="1"/>
             </a:ext>
           </a:extLst>
         </p:spPr>
@@ -8274,7 +8521,7 @@
           </a:ln>
           <a:extLst>
             <a:ext uri="{C572A759-6A51-4108-AA02-DFA0A04FC94B}">
-              <ma14:wrappingTextBoxFlag xmlns="" xmlns:ma14="http://schemas.microsoft.com/office/mac/drawingml/2011/main" val="1"/>
+              <ma14:wrappingTextBoxFlag xmlns:ma14="http://schemas.microsoft.com/office/mac/drawingml/2011/main" xmlns="" val="1"/>
             </a:ext>
           </a:extLst>
         </p:spPr>
@@ -8330,7 +8577,7 @@
           </a:ln>
           <a:extLst>
             <a:ext uri="{C572A759-6A51-4108-AA02-DFA0A04FC94B}">
-              <ma14:wrappingTextBoxFlag xmlns="" xmlns:ma14="http://schemas.microsoft.com/office/mac/drawingml/2011/main" val="1"/>
+              <ma14:wrappingTextBoxFlag xmlns:ma14="http://schemas.microsoft.com/office/mac/drawingml/2011/main" xmlns="" val="1"/>
             </a:ext>
           </a:extLst>
         </p:spPr>
@@ -8388,7 +8635,7 @@
           </a:ln>
           <a:extLst>
             <a:ext uri="{C572A759-6A51-4108-AA02-DFA0A04FC94B}">
-              <ma14:wrappingTextBoxFlag xmlns="" xmlns:ma14="http://schemas.microsoft.com/office/mac/drawingml/2011/main" val="1"/>
+              <ma14:wrappingTextBoxFlag xmlns:ma14="http://schemas.microsoft.com/office/mac/drawingml/2011/main" xmlns="" val="1"/>
             </a:ext>
           </a:extLst>
         </p:spPr>
@@ -9560,7 +9807,7 @@
           </a:ln>
           <a:extLst>
             <a:ext uri="{C572A759-6A51-4108-AA02-DFA0A04FC94B}">
-              <ma14:wrappingTextBoxFlag xmlns="" xmlns:ma14="http://schemas.microsoft.com/office/mac/drawingml/2011/main" val="1"/>
+              <ma14:wrappingTextBoxFlag xmlns:ma14="http://schemas.microsoft.com/office/mac/drawingml/2011/main" xmlns="" val="1"/>
             </a:ext>
           </a:extLst>
         </p:spPr>
@@ -9616,7 +9863,7 @@
           </a:ln>
           <a:extLst>
             <a:ext uri="{C572A759-6A51-4108-AA02-DFA0A04FC94B}">
-              <ma14:wrappingTextBoxFlag xmlns="" xmlns:ma14="http://schemas.microsoft.com/office/mac/drawingml/2011/main" val="1"/>
+              <ma14:wrappingTextBoxFlag xmlns:ma14="http://schemas.microsoft.com/office/mac/drawingml/2011/main" xmlns="" val="1"/>
             </a:ext>
           </a:extLst>
         </p:spPr>
@@ -9674,7 +9921,7 @@
           </a:ln>
           <a:extLst>
             <a:ext uri="{C572A759-6A51-4108-AA02-DFA0A04FC94B}">
-              <ma14:wrappingTextBoxFlag xmlns="" xmlns:ma14="http://schemas.microsoft.com/office/mac/drawingml/2011/main" val="1"/>
+              <ma14:wrappingTextBoxFlag xmlns:ma14="http://schemas.microsoft.com/office/mac/drawingml/2011/main" xmlns="" val="1"/>
             </a:ext>
           </a:extLst>
         </p:spPr>
@@ -10208,7 +10455,7 @@
           </a:ln>
           <a:extLst>
             <a:ext uri="{C572A759-6A51-4108-AA02-DFA0A04FC94B}">
-              <ma14:wrappingTextBoxFlag xmlns="" xmlns:ma14="http://schemas.microsoft.com/office/mac/drawingml/2011/main" val="1"/>
+              <ma14:wrappingTextBoxFlag xmlns:ma14="http://schemas.microsoft.com/office/mac/drawingml/2011/main" xmlns="" val="1"/>
             </a:ext>
           </a:extLst>
         </p:spPr>
@@ -10264,7 +10511,7 @@
           </a:ln>
           <a:extLst>
             <a:ext uri="{C572A759-6A51-4108-AA02-DFA0A04FC94B}">
-              <ma14:wrappingTextBoxFlag xmlns="" xmlns:ma14="http://schemas.microsoft.com/office/mac/drawingml/2011/main" val="1"/>
+              <ma14:wrappingTextBoxFlag xmlns:ma14="http://schemas.microsoft.com/office/mac/drawingml/2011/main" xmlns="" val="1"/>
             </a:ext>
           </a:extLst>
         </p:spPr>
@@ -10322,7 +10569,7 @@
           </a:ln>
           <a:extLst>
             <a:ext uri="{C572A759-6A51-4108-AA02-DFA0A04FC94B}">
-              <ma14:wrappingTextBoxFlag xmlns="" xmlns:ma14="http://schemas.microsoft.com/office/mac/drawingml/2011/main" val="1"/>
+              <ma14:wrappingTextBoxFlag xmlns:ma14="http://schemas.microsoft.com/office/mac/drawingml/2011/main" xmlns="" val="1"/>
             </a:ext>
           </a:extLst>
         </p:spPr>
@@ -11239,7 +11486,7 @@
           </a:ln>
           <a:extLst>
             <a:ext uri="{C572A759-6A51-4108-AA02-DFA0A04FC94B}">
-              <ma14:wrappingTextBoxFlag xmlns="" xmlns:ma14="http://schemas.microsoft.com/office/mac/drawingml/2011/main" val="1"/>
+              <ma14:wrappingTextBoxFlag xmlns:ma14="http://schemas.microsoft.com/office/mac/drawingml/2011/main" xmlns="" val="1"/>
             </a:ext>
           </a:extLst>
         </p:spPr>
@@ -11382,7 +11629,7 @@
           </a:ln>
           <a:extLst>
             <a:ext uri="{C572A759-6A51-4108-AA02-DFA0A04FC94B}">
-              <ma14:wrappingTextBoxFlag xmlns="" xmlns:ma14="http://schemas.microsoft.com/office/mac/drawingml/2011/main" val="1"/>
+              <ma14:wrappingTextBoxFlag xmlns:ma14="http://schemas.microsoft.com/office/mac/drawingml/2011/main" xmlns="" val="1"/>
             </a:ext>
           </a:extLst>
         </p:spPr>
@@ -11440,7 +11687,7 @@
           </a:ln>
           <a:extLst>
             <a:ext uri="{C572A759-6A51-4108-AA02-DFA0A04FC94B}">
-              <ma14:wrappingTextBoxFlag xmlns="" xmlns:ma14="http://schemas.microsoft.com/office/mac/drawingml/2011/main" val="1"/>
+              <ma14:wrappingTextBoxFlag xmlns:ma14="http://schemas.microsoft.com/office/mac/drawingml/2011/main" xmlns="" val="1"/>
             </a:ext>
           </a:extLst>
         </p:spPr>
@@ -12347,7 +12594,7 @@
           </a:ln>
           <a:extLst>
             <a:ext uri="{C572A759-6A51-4108-AA02-DFA0A04FC94B}">
-              <ma14:wrappingTextBoxFlag xmlns="" xmlns:ma14="http://schemas.microsoft.com/office/mac/drawingml/2011/main" val="1"/>
+              <ma14:wrappingTextBoxFlag xmlns:ma14="http://schemas.microsoft.com/office/mac/drawingml/2011/main" xmlns="" val="1"/>
             </a:ext>
           </a:extLst>
         </p:spPr>
@@ -12398,7 +12645,7 @@
           </a:ln>
           <a:extLst>
             <a:ext uri="{C572A759-6A51-4108-AA02-DFA0A04FC94B}">
-              <ma14:wrappingTextBoxFlag xmlns="" xmlns:ma14="http://schemas.microsoft.com/office/mac/drawingml/2011/main" val="1"/>
+              <ma14:wrappingTextBoxFlag xmlns:ma14="http://schemas.microsoft.com/office/mac/drawingml/2011/main" xmlns="" val="1"/>
             </a:ext>
           </a:extLst>
         </p:spPr>
@@ -12609,7 +12856,7 @@
           </a:ln>
           <a:extLst>
             <a:ext uri="{C572A759-6A51-4108-AA02-DFA0A04FC94B}">
-              <ma14:wrappingTextBoxFlag xmlns="" xmlns:ma14="http://schemas.microsoft.com/office/mac/drawingml/2011/main" val="1"/>
+              <ma14:wrappingTextBoxFlag xmlns:ma14="http://schemas.microsoft.com/office/mac/drawingml/2011/main" xmlns="" val="1"/>
             </a:ext>
           </a:extLst>
         </p:spPr>
@@ -12654,7 +12901,7 @@
           </a:ln>
           <a:extLst>
             <a:ext uri="{C572A759-6A51-4108-AA02-DFA0A04FC94B}">
-              <ma14:wrappingTextBoxFlag xmlns="" xmlns:ma14="http://schemas.microsoft.com/office/mac/drawingml/2011/main" val="1"/>
+              <ma14:wrappingTextBoxFlag xmlns:ma14="http://schemas.microsoft.com/office/mac/drawingml/2011/main" xmlns="" val="1"/>
             </a:ext>
           </a:extLst>
         </p:spPr>
@@ -12805,7 +13052,7 @@
           </a:ln>
           <a:extLst>
             <a:ext uri="{C572A759-6A51-4108-AA02-DFA0A04FC94B}">
-              <ma14:wrappingTextBoxFlag xmlns="" xmlns:ma14="http://schemas.microsoft.com/office/mac/drawingml/2011/main" val="1"/>
+              <ma14:wrappingTextBoxFlag xmlns:ma14="http://schemas.microsoft.com/office/mac/drawingml/2011/main" xmlns="" val="1"/>
             </a:ext>
           </a:extLst>
         </p:spPr>
@@ -12913,7 +13160,7 @@
           </a:ln>
           <a:extLst>
             <a:ext uri="{C572A759-6A51-4108-AA02-DFA0A04FC94B}">
-              <ma14:wrappingTextBoxFlag xmlns="" xmlns:ma14="http://schemas.microsoft.com/office/mac/drawingml/2011/main" val="1"/>
+              <ma14:wrappingTextBoxFlag xmlns:ma14="http://schemas.microsoft.com/office/mac/drawingml/2011/main" xmlns="" val="1"/>
             </a:ext>
           </a:extLst>
         </p:spPr>
@@ -12986,7 +13233,7 @@
           </a:ln>
           <a:extLst>
             <a:ext uri="{C572A759-6A51-4108-AA02-DFA0A04FC94B}">
-              <ma14:wrappingTextBoxFlag xmlns="" xmlns:ma14="http://schemas.microsoft.com/office/mac/drawingml/2011/main" val="1"/>
+              <ma14:wrappingTextBoxFlag xmlns:ma14="http://schemas.microsoft.com/office/mac/drawingml/2011/main" xmlns="" val="1"/>
             </a:ext>
           </a:extLst>
         </p:spPr>
@@ -13254,7 +13501,7 @@
           </a:ln>
           <a:extLst>
             <a:ext uri="{C572A759-6A51-4108-AA02-DFA0A04FC94B}">
-              <ma14:wrappingTextBoxFlag xmlns:ma14="http://schemas.microsoft.com/office/mac/drawingml/2011/main" xmlns="" val="1"/>
+              <ma14:wrappingTextBoxFlag xmlns="" xmlns:ma14="http://schemas.microsoft.com/office/mac/drawingml/2011/main" val="1"/>
             </a:ext>
           </a:extLst>
         </p:spPr>
@@ -13315,7 +13562,7 @@
           </a:ln>
           <a:extLst>
             <a:ext uri="{C572A759-6A51-4108-AA02-DFA0A04FC94B}">
-              <ma14:wrappingTextBoxFlag xmlns:ma14="http://schemas.microsoft.com/office/mac/drawingml/2011/main" xmlns="" val="1"/>
+              <ma14:wrappingTextBoxFlag xmlns="" xmlns:ma14="http://schemas.microsoft.com/office/mac/drawingml/2011/main" val="1"/>
             </a:ext>
           </a:extLst>
         </p:spPr>
@@ -13583,7 +13830,7 @@
           </a:ln>
           <a:extLst>
             <a:ext uri="{C572A759-6A51-4108-AA02-DFA0A04FC94B}">
-              <ma14:wrappingTextBoxFlag xmlns="" xmlns:ma14="http://schemas.microsoft.com/office/mac/drawingml/2011/main" val="1"/>
+              <ma14:wrappingTextBoxFlag xmlns:ma14="http://schemas.microsoft.com/office/mac/drawingml/2011/main" xmlns="" val="1"/>
             </a:ext>
           </a:extLst>
         </p:spPr>
@@ -13644,7 +13891,7 @@
           </a:ln>
           <a:extLst>
             <a:ext uri="{C572A759-6A51-4108-AA02-DFA0A04FC94B}">
-              <ma14:wrappingTextBoxFlag xmlns="" xmlns:ma14="http://schemas.microsoft.com/office/mac/drawingml/2011/main" val="1"/>
+              <ma14:wrappingTextBoxFlag xmlns:ma14="http://schemas.microsoft.com/office/mac/drawingml/2011/main" xmlns="" val="1"/>
             </a:ext>
           </a:extLst>
         </p:spPr>
@@ -14329,7 +14576,7 @@
           </a:ln>
           <a:extLst>
             <a:ext uri="{C572A759-6A51-4108-AA02-DFA0A04FC94B}">
-              <ma14:wrappingTextBoxFlag xmlns:ma14="http://schemas.microsoft.com/office/mac/drawingml/2011/main" xmlns="" val="1"/>
+              <ma14:wrappingTextBoxFlag xmlns="" xmlns:ma14="http://schemas.microsoft.com/office/mac/drawingml/2011/main" val="1"/>
             </a:ext>
           </a:extLst>
         </p:spPr>
@@ -14379,7 +14626,7 @@
           </a:ln>
           <a:extLst>
             <a:ext uri="{C572A759-6A51-4108-AA02-DFA0A04FC94B}">
-              <ma14:wrappingTextBoxFlag xmlns:ma14="http://schemas.microsoft.com/office/mac/drawingml/2011/main" xmlns="" val="1"/>
+              <ma14:wrappingTextBoxFlag xmlns="" xmlns:ma14="http://schemas.microsoft.com/office/mac/drawingml/2011/main" val="1"/>
             </a:ext>
           </a:extLst>
         </p:spPr>
@@ -14431,7 +14678,7 @@
           </a:ln>
           <a:extLst>
             <a:ext uri="{C572A759-6A51-4108-AA02-DFA0A04FC94B}">
-              <ma14:wrappingTextBoxFlag xmlns:ma14="http://schemas.microsoft.com/office/mac/drawingml/2011/main" xmlns="" val="1"/>
+              <ma14:wrappingTextBoxFlag xmlns="" xmlns:ma14="http://schemas.microsoft.com/office/mac/drawingml/2011/main" val="1"/>
             </a:ext>
           </a:extLst>
         </p:spPr>
@@ -15334,7 +15581,7 @@
           </a:ln>
           <a:extLst>
             <a:ext uri="{C572A759-6A51-4108-AA02-DFA0A04FC94B}">
-              <ma14:wrappingTextBoxFlag xmlns="" xmlns:ma14="http://schemas.microsoft.com/office/mac/drawingml/2011/main" val="1"/>
+              <ma14:wrappingTextBoxFlag xmlns:ma14="http://schemas.microsoft.com/office/mac/drawingml/2011/main" xmlns="" val="1"/>
             </a:ext>
           </a:extLst>
         </p:spPr>
@@ -15381,7 +15628,7 @@
           </a:ln>
           <a:extLst>
             <a:ext uri="{C572A759-6A51-4108-AA02-DFA0A04FC94B}">
-              <ma14:wrappingTextBoxFlag xmlns="" xmlns:ma14="http://schemas.microsoft.com/office/mac/drawingml/2011/main" val="1"/>
+              <ma14:wrappingTextBoxFlag xmlns:ma14="http://schemas.microsoft.com/office/mac/drawingml/2011/main" xmlns="" val="1"/>
             </a:ext>
           </a:extLst>
         </p:spPr>
@@ -15426,7 +15673,7 @@
           </a:ln>
           <a:extLst>
             <a:ext uri="{C572A759-6A51-4108-AA02-DFA0A04FC94B}">
-              <ma14:wrappingTextBoxFlag xmlns="" xmlns:ma14="http://schemas.microsoft.com/office/mac/drawingml/2011/main" val="1"/>
+              <ma14:wrappingTextBoxFlag xmlns:ma14="http://schemas.microsoft.com/office/mac/drawingml/2011/main" xmlns="" val="1"/>
             </a:ext>
           </a:extLst>
         </p:spPr>
@@ -15491,7 +15738,7 @@
           </a:ln>
           <a:extLst>
             <a:ext uri="{C572A759-6A51-4108-AA02-DFA0A04FC94B}">
-              <ma14:wrappingTextBoxFlag xmlns="" xmlns:ma14="http://schemas.microsoft.com/office/mac/drawingml/2011/main" val="1"/>
+              <ma14:wrappingTextBoxFlag xmlns:ma14="http://schemas.microsoft.com/office/mac/drawingml/2011/main" xmlns="" val="1"/>
             </a:ext>
           </a:extLst>
         </p:spPr>
@@ -15906,7 +16153,7 @@
           </a:ln>
           <a:extLst>
             <a:ext uri="{C572A759-6A51-4108-AA02-DFA0A04FC94B}">
-              <ma14:wrappingTextBoxFlag xmlns="" xmlns:ma14="http://schemas.microsoft.com/office/mac/drawingml/2011/main" val="1"/>
+              <ma14:wrappingTextBoxFlag xmlns:ma14="http://schemas.microsoft.com/office/mac/drawingml/2011/main" xmlns="" val="1"/>
             </a:ext>
           </a:extLst>
         </p:spPr>
@@ -15959,7 +16206,7 @@
           </a:ln>
           <a:extLst>
             <a:ext uri="{C572A759-6A51-4108-AA02-DFA0A04FC94B}">
-              <ma14:wrappingTextBoxFlag xmlns="" xmlns:ma14="http://schemas.microsoft.com/office/mac/drawingml/2011/main" val="1"/>
+              <ma14:wrappingTextBoxFlag xmlns:ma14="http://schemas.microsoft.com/office/mac/drawingml/2011/main" xmlns="" val="1"/>
             </a:ext>
           </a:extLst>
         </p:spPr>
@@ -16010,7 +16257,7 @@
           </a:ln>
           <a:extLst>
             <a:ext uri="{C572A759-6A51-4108-AA02-DFA0A04FC94B}">
-              <ma14:wrappingTextBoxFlag xmlns="" xmlns:ma14="http://schemas.microsoft.com/office/mac/drawingml/2011/main" val="1"/>
+              <ma14:wrappingTextBoxFlag xmlns:ma14="http://schemas.microsoft.com/office/mac/drawingml/2011/main" xmlns="" val="1"/>
             </a:ext>
           </a:extLst>
         </p:spPr>
@@ -16081,7 +16328,7 @@
           </a:ln>
           <a:extLst>
             <a:ext uri="{C572A759-6A51-4108-AA02-DFA0A04FC94B}">
-              <ma14:wrappingTextBoxFlag xmlns="" xmlns:ma14="http://schemas.microsoft.com/office/mac/drawingml/2011/main" val="1"/>
+              <ma14:wrappingTextBoxFlag xmlns:ma14="http://schemas.microsoft.com/office/mac/drawingml/2011/main" xmlns="" val="1"/>
             </a:ext>
           </a:extLst>
         </p:spPr>
@@ -16122,7 +16369,7 @@
         <p:spPr>
           <a:xfrm>
             <a:off x="179358" y="943107"/>
-            <a:ext cx="3686400" cy="3831818"/>
+            <a:ext cx="3686400" cy="230832"/>
           </a:xfrm>
           <a:prstGeom prst="rect">
             <a:avLst/>
@@ -16156,295 +16403,16 @@
             <a:pPr>
               <a:buNone/>
             </a:pPr>
-            <a:r>
-              <a:rPr lang="en-US" sz="900" b="1" dirty="0">
-                <a:highlight>
-                  <a:srgbClr val="FFFF00"/>
-                </a:highlight>
-              </a:rPr>
-              <a:t>Hibernating (30% of sales)</a:t>
-            </a:r>
-          </a:p>
-          <a:p>
-            <a:pPr>
-              <a:buFont typeface="Arial" panose="020B0604020202020204" pitchFamily="34" charset="0"/>
-              <a:buChar char="•"/>
-            </a:pPr>
-            <a:r>
-              <a:rPr lang="en-US" sz="900" b="1" dirty="0"/>
-              <a:t>AVG age</a:t>
-            </a:r>
-            <a:r>
-              <a:rPr lang="en-US" sz="900" dirty="0"/>
-              <a:t>: 47.6 | </a:t>
-            </a:r>
-            <a:r>
-              <a:rPr lang="en-US" sz="900" b="1" dirty="0"/>
-              <a:t>Balanced gender</a:t>
-            </a:r>
-            <a:r>
-              <a:rPr lang="en-US" sz="900" dirty="0"/>
-              <a:t> | </a:t>
-            </a:r>
-            <a:r>
-              <a:rPr lang="en-US" sz="900" b="1" dirty="0"/>
-              <a:t>Low % unknown (U)</a:t>
-            </a:r>
-            <a:r>
-              <a:rPr lang="en-US" sz="900" dirty="0"/>
-              <a:t>: 0.40%</a:t>
-            </a:r>
-          </a:p>
-          <a:p>
-            <a:pPr>
-              <a:buFont typeface="Arial" panose="020B0604020202020204" pitchFamily="34" charset="0"/>
-              <a:buChar char="•"/>
-            </a:pPr>
-            <a:r>
-              <a:rPr lang="en-US" sz="900" b="1" dirty="0"/>
-              <a:t>Channel Use</a:t>
-            </a:r>
-            <a:r>
-              <a:rPr lang="en-US" sz="900" dirty="0"/>
-              <a:t>: 49% online, 49% offline</a:t>
-            </a:r>
-          </a:p>
-          <a:p>
-            <a:pPr>
-              <a:buFont typeface="Arial" panose="020B0604020202020204" pitchFamily="34" charset="0"/>
-              <a:buChar char="•"/>
-            </a:pPr>
-            <a:r>
-              <a:rPr lang="en-US" sz="900" b="1" dirty="0"/>
-              <a:t>Insight</a:t>
-            </a:r>
-            <a:r>
-              <a:rPr lang="en-US" sz="900" dirty="0"/>
-              <a:t>: This large group is equally split across channels and genders. A general reactivation campaign with broad targeting could be effective.</a:t>
-            </a:r>
-          </a:p>
-          <a:p>
-            <a:pPr>
-              <a:buNone/>
-            </a:pPr>
-            <a:r>
-              <a:rPr lang="en-US" sz="900" b="1" dirty="0">
-                <a:highlight>
-                  <a:srgbClr val="FFFF00"/>
-                </a:highlight>
-              </a:rPr>
-              <a:t>At Risk (25%)</a:t>
-            </a:r>
-          </a:p>
-          <a:p>
-            <a:pPr>
-              <a:buFont typeface="Arial" panose="020B0604020202020204" pitchFamily="34" charset="0"/>
-              <a:buChar char="•"/>
-            </a:pPr>
-            <a:r>
-              <a:rPr lang="en-US" sz="900" b="1" dirty="0"/>
-              <a:t>AVG age</a:t>
-            </a:r>
-            <a:r>
-              <a:rPr lang="en-US" sz="900" dirty="0"/>
-              <a:t>: 48.2 | </a:t>
-            </a:r>
-            <a:r>
-              <a:rPr lang="en-US" sz="900" b="1" dirty="0"/>
-              <a:t>Low engagement from unknown users</a:t>
-            </a:r>
-            <a:r>
-              <a:rPr lang="en-US" sz="900" dirty="0"/>
-              <a:t> (0.36%)</a:t>
-            </a:r>
-          </a:p>
-          <a:p>
-            <a:pPr>
-              <a:buFont typeface="Arial" panose="020B0604020202020204" pitchFamily="34" charset="0"/>
-              <a:buChar char="•"/>
-            </a:pPr>
-            <a:r>
-              <a:rPr lang="en-US" sz="900" b="1" dirty="0"/>
-              <a:t>Channels</a:t>
-            </a:r>
-            <a:r>
-              <a:rPr lang="en-US" sz="900" dirty="0"/>
-              <a:t>: Also 49% online/offline</a:t>
-            </a:r>
-          </a:p>
-          <a:p>
-            <a:pPr>
-              <a:buFont typeface="Arial" panose="020B0604020202020204" pitchFamily="34" charset="0"/>
-              <a:buChar char="•"/>
-            </a:pPr>
-            <a:r>
-              <a:rPr lang="en-US" sz="900" b="1" dirty="0"/>
-              <a:t>Insight</a:t>
-            </a:r>
-            <a:r>
-              <a:rPr lang="en-US" sz="900" dirty="0"/>
-              <a:t>: Similar to Hibernating but slightly younger. Consider segmented re-engagement messaging based on past products purchased.</a:t>
-            </a:r>
-          </a:p>
-          <a:p>
-            <a:pPr>
-              <a:buNone/>
-            </a:pPr>
-            <a:r>
-              <a:rPr lang="en-US" sz="900" b="1" dirty="0">
-                <a:highlight>
-                  <a:srgbClr val="FFFF00"/>
-                </a:highlight>
-              </a:rPr>
-              <a:t>Potential Loyalist (9.3%)</a:t>
-            </a:r>
-          </a:p>
-          <a:p>
-            <a:pPr>
-              <a:buFont typeface="Arial" panose="020B0604020202020204" pitchFamily="34" charset="0"/>
-              <a:buChar char="•"/>
-            </a:pPr>
-            <a:r>
-              <a:rPr lang="en-US" sz="900" b="1" dirty="0"/>
-              <a:t>Notable Sub-Segment</a:t>
-            </a:r>
-            <a:r>
-              <a:rPr lang="en-US" sz="900" dirty="0"/>
-              <a:t>:</a:t>
-            </a:r>
-          </a:p>
-          <a:p>
-            <a:pPr marL="742950" lvl="1" indent="-285750">
-              <a:buFont typeface="Arial" panose="020B0604020202020204" pitchFamily="34" charset="0"/>
-              <a:buChar char="•"/>
-            </a:pPr>
-            <a:r>
-              <a:rPr lang="en-US" sz="900" b="1" dirty="0"/>
-              <a:t>Health</a:t>
-            </a:r>
-            <a:r>
-              <a:rPr lang="en-US" sz="900" dirty="0"/>
-              <a:t> and </a:t>
-            </a:r>
-            <a:r>
-              <a:rPr lang="en-US" sz="900" b="1" dirty="0"/>
-              <a:t>Financial Services</a:t>
-            </a:r>
-            <a:r>
-              <a:rPr lang="en-US" sz="900" dirty="0"/>
-              <a:t> skew older (AVG ~51.6 &amp; 47.6), with a </a:t>
-            </a:r>
-            <a:r>
-              <a:rPr lang="en-US" sz="900" b="1" dirty="0"/>
-              <a:t>higher % unknown</a:t>
-            </a:r>
-            <a:r>
-              <a:rPr lang="en-US" sz="900" dirty="0"/>
-              <a:t> (e.g. 3.85% for Financial).</a:t>
-            </a:r>
-          </a:p>
-          <a:p>
-            <a:pPr marL="742950" lvl="1" indent="-285750">
-              <a:buFont typeface="Arial" panose="020B0604020202020204" pitchFamily="34" charset="0"/>
-              <a:buChar char="•"/>
-            </a:pPr>
-            <a:r>
-              <a:rPr lang="en-US" sz="900" b="1" dirty="0"/>
-              <a:t>Retail</a:t>
-            </a:r>
-            <a:r>
-              <a:rPr lang="en-US" sz="900" dirty="0"/>
-              <a:t> users are younger (AVG 46.7), mostly offline.</a:t>
-            </a:r>
-          </a:p>
-          <a:p>
-            <a:pPr>
-              <a:buFont typeface="Arial" panose="020B0604020202020204" pitchFamily="34" charset="0"/>
-              <a:buChar char="•"/>
-            </a:pPr>
-            <a:r>
-              <a:rPr lang="en-US" sz="900" b="1" dirty="0"/>
-              <a:t>Insight</a:t>
-            </a:r>
-            <a:r>
-              <a:rPr lang="en-US" sz="900" dirty="0"/>
-              <a:t>: Potential for conversion to Loyal or Champions; segment-specific strategies work best (e.g., financial incentives for younger Retail buyers, trust-building for Health).</a:t>
-            </a:r>
-          </a:p>
-          <a:p>
-            <a:pPr>
-              <a:buNone/>
-            </a:pPr>
-            <a:r>
-              <a:rPr lang="en-US" sz="900" b="1" dirty="0">
-                <a:highlight>
-                  <a:srgbClr val="FFFF00"/>
-                </a:highlight>
-              </a:rPr>
-              <a:t>Loyal Customers (6.8%)</a:t>
-            </a:r>
-          </a:p>
-          <a:p>
-            <a:pPr>
-              <a:buFont typeface="Arial" panose="020B0604020202020204" pitchFamily="34" charset="0"/>
-              <a:buChar char="•"/>
-            </a:pPr>
-            <a:r>
-              <a:rPr lang="en-US" sz="900" b="1" dirty="0"/>
-              <a:t>AVG age</a:t>
-            </a:r>
-            <a:r>
-              <a:rPr lang="en-US" sz="900" dirty="0"/>
-              <a:t>: 46.1 | Slight male skew | </a:t>
-            </a:r>
-            <a:r>
-              <a:rPr lang="en-US" sz="900" b="1" dirty="0"/>
-              <a:t>Low %U</a:t>
-            </a:r>
-            <a:endParaRPr lang="en-US" sz="900" dirty="0"/>
-          </a:p>
-          <a:p>
-            <a:pPr>
-              <a:buFont typeface="Arial" panose="020B0604020202020204" pitchFamily="34" charset="0"/>
-              <a:buChar char="•"/>
-            </a:pPr>
-            <a:r>
-              <a:rPr lang="en-US" sz="900" b="1" dirty="0"/>
-              <a:t>Channel</a:t>
-            </a:r>
-            <a:r>
-              <a:rPr lang="en-US" sz="900" dirty="0"/>
-              <a:t>: Balanced</a:t>
-            </a:r>
-          </a:p>
-          <a:p>
-            <a:pPr>
-              <a:buFont typeface="Arial" panose="020B0604020202020204" pitchFamily="34" charset="0"/>
-              <a:buChar char="•"/>
-            </a:pPr>
-            <a:r>
-              <a:rPr lang="en-US" sz="900" b="1" dirty="0"/>
-              <a:t>Insight</a:t>
-            </a:r>
-            <a:r>
-              <a:rPr lang="en-US" sz="900" dirty="0"/>
-              <a:t>: Strong segment. Maintain with loyalty rewards, referral bonuses.</a:t>
-            </a:r>
-          </a:p>
-          <a:p>
-            <a:pPr>
-              <a:buNone/>
-            </a:pPr>
             <a:endParaRPr lang="en-US" sz="900" dirty="0"/>
           </a:p>
         </p:txBody>
       </p:sp>
       <p:pic>
         <p:nvPicPr>
-          <p:cNvPr id="3" name="Grafik 2" descr="Ein Bild, das Text, Screenshot, Zahl, Schrift enthält.&#10;&#10;KI-generierte Inhalte können fehlerhaft sein.">
+          <p:cNvPr id="4" name="Grafik 3" descr="Ein Bild, das Text, Screenshot, Zahl, Schrift enthält.&#10;&#10;KI-generierte Inhalte können fehlerhaft sein.">
             <a:extLst>
               <a:ext uri="{FF2B5EF4-FFF2-40B4-BE49-F238E27FC236}">
-                <a16:creationId xmlns:a16="http://schemas.microsoft.com/office/drawing/2014/main" id="{BA6863F9-E687-CBAC-322A-AB5F53B3D68A}"/>
+                <a16:creationId xmlns:a16="http://schemas.microsoft.com/office/drawing/2014/main" id="{6660982A-8565-B1C5-B084-EE7AB6158114}"/>
               </a:ext>
             </a:extLst>
           </p:cNvPr>
@@ -16467,8 +16435,8 @@
         </p:blipFill>
         <p:spPr>
           <a:xfrm>
-            <a:off x="3942558" y="943107"/>
-            <a:ext cx="4478400" cy="2224541"/>
+            <a:off x="3704316" y="787402"/>
+            <a:ext cx="5040642" cy="2274911"/>
           </a:xfrm>
           <a:prstGeom prst="rect">
             <a:avLst/>
@@ -16477,10 +16445,10 @@
       </p:pic>
       <p:sp>
         <p:nvSpPr>
-          <p:cNvPr id="6" name="Textfeld 5">
+          <p:cNvPr id="24" name="Textfeld 23">
             <a:extLst>
               <a:ext uri="{FF2B5EF4-FFF2-40B4-BE49-F238E27FC236}">
-                <a16:creationId xmlns:a16="http://schemas.microsoft.com/office/drawing/2014/main" id="{F4BD6310-0FD4-9308-1389-8373B3E77B3B}"/>
+                <a16:creationId xmlns:a16="http://schemas.microsoft.com/office/drawing/2014/main" id="{77A639EA-5B98-86D9-3A15-D9791D9BD5B0}"/>
               </a:ext>
             </a:extLst>
           </p:cNvPr>
@@ -16489,8 +16457,8 @@
         </p:nvSpPr>
         <p:spPr>
           <a:xfrm>
-            <a:off x="3800901" y="3236478"/>
-            <a:ext cx="5375000" cy="1754326"/>
+            <a:off x="237600" y="871990"/>
+            <a:ext cx="3427441" cy="1785104"/>
           </a:xfrm>
           <a:prstGeom prst="rect">
             <a:avLst/>
@@ -16525,12 +16493,8 @@
               <a:buNone/>
             </a:pPr>
             <a:r>
-              <a:rPr lang="en-US" sz="900" b="1" dirty="0">
-                <a:highlight>
-                  <a:srgbClr val="FFFF00"/>
-                </a:highlight>
-              </a:rPr>
-              <a:t>Recent Customers (6.3%)</a:t>
+              <a:rPr lang="en-US" sz="1000" b="1" dirty="0"/>
+              <a:t>Top Customer Segments by Sales</a:t>
             </a:r>
           </a:p>
           <a:p>
@@ -16539,12 +16503,83 @@
               <a:buChar char="•"/>
             </a:pPr>
             <a:r>
-              <a:rPr lang="en-US" sz="900" b="1" dirty="0"/>
-              <a:t>AVG age</a:t>
-            </a:r>
-            <a:r>
-              <a:rPr lang="en-US" sz="900" dirty="0"/>
-              <a:t>: 48.4 | Online preference (51%)</a:t>
+              <a:rPr lang="en-US" sz="1000" b="1" dirty="0"/>
+              <a:t>Loyal Customers</a:t>
+            </a:r>
+            <a:r>
+              <a:rPr lang="en-US" sz="1000" dirty="0"/>
+              <a:t>, </a:t>
+            </a:r>
+            <a:r>
+              <a:rPr lang="en-US" sz="1000" b="1" dirty="0"/>
+              <a:t>At Risk</a:t>
+            </a:r>
+            <a:r>
+              <a:rPr lang="en-US" sz="1000" dirty="0"/>
+              <a:t>, and </a:t>
+            </a:r>
+            <a:r>
+              <a:rPr lang="en-US" sz="1000" b="1" dirty="0"/>
+              <a:t>Promising</a:t>
+            </a:r>
+            <a:r>
+              <a:rPr lang="en-US" sz="1000" dirty="0"/>
+              <a:t> segments generate the highest total sales:</a:t>
+            </a:r>
+          </a:p>
+          <a:p>
+            <a:pPr marL="742950" lvl="1" indent="-285750">
+              <a:buFont typeface="Arial" panose="020B0604020202020204" pitchFamily="34" charset="0"/>
+              <a:buChar char="•"/>
+            </a:pPr>
+            <a:r>
+              <a:rPr lang="en-US" sz="1000" b="1" dirty="0"/>
+              <a:t>Loyal Customers</a:t>
+            </a:r>
+            <a:r>
+              <a:rPr lang="en-US" sz="1000" dirty="0"/>
+              <a:t>: €147,663</a:t>
+            </a:r>
+          </a:p>
+          <a:p>
+            <a:pPr marL="742950" lvl="1" indent="-285750">
+              <a:buFont typeface="Arial" panose="020B0604020202020204" pitchFamily="34" charset="0"/>
+              <a:buChar char="•"/>
+            </a:pPr>
+            <a:r>
+              <a:rPr lang="en-US" sz="1000" b="1" dirty="0"/>
+              <a:t>At Risk</a:t>
+            </a:r>
+            <a:r>
+              <a:rPr lang="en-US" sz="1000" dirty="0"/>
+              <a:t>: €144,159</a:t>
+            </a:r>
+          </a:p>
+          <a:p>
+            <a:pPr marL="742950" lvl="1" indent="-285750">
+              <a:buFont typeface="Arial" panose="020B0604020202020204" pitchFamily="34" charset="0"/>
+              <a:buChar char="•"/>
+            </a:pPr>
+            <a:r>
+              <a:rPr lang="en-US" sz="1000" b="1" dirty="0"/>
+              <a:t>Promising</a:t>
+            </a:r>
+            <a:r>
+              <a:rPr lang="en-US" sz="1000" dirty="0"/>
+              <a:t>: €114,411</a:t>
+            </a:r>
+          </a:p>
+          <a:p>
+            <a:pPr>
+              <a:buNone/>
+            </a:pPr>
+            <a:r>
+              <a:rPr lang="en-US" sz="1000" b="1" dirty="0"/>
+              <a:t>Recommendation</a:t>
+            </a:r>
+            <a:r>
+              <a:rPr lang="en-US" sz="1000" dirty="0"/>
+              <a:t>:</a:t>
             </a:r>
           </a:p>
           <a:p>
@@ -16553,25 +16588,16 @@
               <a:buChar char="•"/>
             </a:pPr>
             <a:r>
-              <a:rPr lang="en-US" sz="900" b="1" dirty="0"/>
-              <a:t>Insight</a:t>
-            </a:r>
-            <a:r>
-              <a:rPr lang="en-US" sz="900" dirty="0"/>
-              <a:t>: Keep them engaged quickly post-purchase via email workflows or personalized online deals.</a:t>
-            </a:r>
-          </a:p>
-          <a:p>
-            <a:pPr>
-              <a:buNone/>
-            </a:pPr>
-            <a:r>
-              <a:rPr lang="en-US" sz="900" b="1" dirty="0">
-                <a:highlight>
-                  <a:srgbClr val="FFFF00"/>
-                </a:highlight>
-              </a:rPr>
-              <a:t>Champions (0.03%)</a:t>
+              <a:rPr lang="en-US" sz="1000" dirty="0"/>
+              <a:t>Prioritize </a:t>
+            </a:r>
+            <a:r>
+              <a:rPr lang="en-US" sz="1000" b="1" dirty="0"/>
+              <a:t>retention strategies</a:t>
+            </a:r>
+            <a:r>
+              <a:rPr lang="en-US" sz="1000" dirty="0"/>
+              <a:t> for At Risk customers (e.g. loyalty offers or reactivation campaigns).</a:t>
             </a:r>
           </a:p>
           <a:p>
@@ -16580,109 +16606,1797 @@
               <a:buChar char="•"/>
             </a:pPr>
             <a:r>
-              <a:rPr lang="en-US" sz="900" b="1" dirty="0"/>
-              <a:t>Small in number but high value (29.97% of sales)</a:t>
-            </a:r>
-            <a:r>
-              <a:rPr lang="en-US" sz="900" dirty="0"/>
-              <a:t> | </a:t>
-            </a:r>
-            <a:r>
-              <a:rPr lang="en-US" sz="900" b="1" dirty="0"/>
-              <a:t>Older (AVG age 57)</a:t>
-            </a:r>
-            <a:r>
-              <a:rPr lang="en-US" sz="900" dirty="0"/>
-              <a:t> | </a:t>
-            </a:r>
-            <a:r>
-              <a:rPr lang="en-US" sz="900" b="1" dirty="0"/>
-              <a:t>Preferred online (67%)</a:t>
-            </a:r>
-            <a:endParaRPr lang="en-US" sz="900" dirty="0"/>
-          </a:p>
-          <a:p>
-            <a:pPr>
-              <a:buFont typeface="Arial" panose="020B0604020202020204" pitchFamily="34" charset="0"/>
+              <a:rPr lang="en-US" sz="1000" dirty="0"/>
+              <a:t>Strengthen loyalty programs for Loyal Customers to maintain engagement.</a:t>
+            </a:r>
+          </a:p>
+        </p:txBody>
+      </p:sp>
+      <p:graphicFrame>
+        <p:nvGraphicFramePr>
+          <p:cNvPr id="25" name="Tabelle 24">
+            <a:extLst>
+              <a:ext uri="{FF2B5EF4-FFF2-40B4-BE49-F238E27FC236}">
+                <a16:creationId xmlns:a16="http://schemas.microsoft.com/office/drawing/2014/main" id="{63DA96F4-1C48-6589-A155-10E9852AAAB1}"/>
+              </a:ext>
+            </a:extLst>
+          </p:cNvPr>
+          <p:cNvGraphicFramePr>
+            <a:graphicFrameLocks noGrp="1"/>
+          </p:cNvGraphicFramePr>
+          <p:nvPr>
+            <p:extLst>
+              <p:ext uri="{D42A27DB-BD31-4B8C-83A1-F6EECF244321}">
+                <p14:modId xmlns:p14="http://schemas.microsoft.com/office/powerpoint/2010/main" val="3760696142"/>
+              </p:ext>
+            </p:extLst>
+          </p:nvPr>
+        </p:nvGraphicFramePr>
+        <p:xfrm>
+          <a:off x="475200" y="3788460"/>
+          <a:ext cx="2584800" cy="1280160"/>
+        </p:xfrm>
+        <a:graphic>
+          <a:graphicData uri="http://schemas.openxmlformats.org/drawingml/2006/table">
+            <a:tbl>
+              <a:tblPr/>
+              <a:tblGrid>
+                <a:gridCol w="1292400">
+                  <a:extLst>
+                    <a:ext uri="{9D8B030D-6E8A-4147-A177-3AD203B41FA5}">
+                      <a16:colId xmlns:a16="http://schemas.microsoft.com/office/drawing/2014/main" val="4015899603"/>
+                    </a:ext>
+                  </a:extLst>
+                </a:gridCol>
+                <a:gridCol w="1292400">
+                  <a:extLst>
+                    <a:ext uri="{9D8B030D-6E8A-4147-A177-3AD203B41FA5}">
+                      <a16:colId xmlns:a16="http://schemas.microsoft.com/office/drawing/2014/main" val="4179530978"/>
+                    </a:ext>
+                  </a:extLst>
+                </a:gridCol>
+              </a:tblGrid>
+              <a:tr h="200391">
+                <a:tc>
+                  <a:txBody>
+                    <a:bodyPr/>
+                    <a:lstStyle/>
+                    <a:p>
+                      <a:pPr algn="ctr"/>
+                      <a:r>
+                        <a:rPr lang="en-US" sz="800"/>
+                        <a:t>Job Industry</a:t>
+                      </a:r>
+                    </a:p>
+                  </a:txBody>
+                  <a:tcPr anchor="ctr">
+                    <a:lnL>
+                      <a:noFill/>
+                    </a:lnL>
+                    <a:lnR>
+                      <a:noFill/>
+                    </a:lnR>
+                    <a:lnT>
+                      <a:noFill/>
+                    </a:lnT>
+                    <a:lnB>
+                      <a:noFill/>
+                    </a:lnB>
+                    <a:noFill/>
+                  </a:tcPr>
+                </a:tc>
+                <a:tc>
+                  <a:txBody>
+                    <a:bodyPr/>
+                    <a:lstStyle/>
+                    <a:p>
+                      <a:pPr algn="ctr"/>
+                      <a:r>
+                        <a:rPr lang="en-US" sz="800"/>
+                        <a:t>Total Sales (€)</a:t>
+                      </a:r>
+                    </a:p>
+                  </a:txBody>
+                  <a:tcPr anchor="ctr">
+                    <a:lnL>
+                      <a:noFill/>
+                    </a:lnL>
+                    <a:lnR>
+                      <a:noFill/>
+                    </a:lnR>
+                    <a:lnT>
+                      <a:noFill/>
+                    </a:lnT>
+                    <a:lnB>
+                      <a:noFill/>
+                    </a:lnB>
+                    <a:noFill/>
+                  </a:tcPr>
+                </a:tc>
+                <a:extLst>
+                  <a:ext uri="{0D108BD9-81ED-4DB2-BD59-A6C34878D82A}">
+                    <a16:rowId xmlns:a16="http://schemas.microsoft.com/office/drawing/2014/main" val="302423841"/>
+                  </a:ext>
+                </a:extLst>
+              </a:tr>
+              <a:tr h="200391">
+                <a:tc>
+                  <a:txBody>
+                    <a:bodyPr/>
+                    <a:lstStyle/>
+                    <a:p>
+                      <a:pPr algn="ctr"/>
+                      <a:r>
+                        <a:rPr lang="en-US" sz="800"/>
+                        <a:t>Financial Services</a:t>
+                      </a:r>
+                    </a:p>
+                  </a:txBody>
+                  <a:tcPr anchor="ctr">
+                    <a:lnL>
+                      <a:noFill/>
+                    </a:lnL>
+                    <a:lnR>
+                      <a:noFill/>
+                    </a:lnR>
+                    <a:lnT>
+                      <a:noFill/>
+                    </a:lnT>
+                    <a:lnB>
+                      <a:noFill/>
+                    </a:lnB>
+                    <a:noFill/>
+                  </a:tcPr>
+                </a:tc>
+                <a:tc>
+                  <a:txBody>
+                    <a:bodyPr/>
+                    <a:lstStyle/>
+                    <a:p>
+                      <a:pPr algn="ctr"/>
+                      <a:r>
+                        <a:rPr lang="en-US" sz="800" dirty="0"/>
+                        <a:t>242,954</a:t>
+                      </a:r>
+                    </a:p>
+                  </a:txBody>
+                  <a:tcPr anchor="ctr">
+                    <a:lnL>
+                      <a:noFill/>
+                    </a:lnL>
+                    <a:lnR>
+                      <a:noFill/>
+                    </a:lnR>
+                    <a:lnT>
+                      <a:noFill/>
+                    </a:lnT>
+                    <a:lnB>
+                      <a:noFill/>
+                    </a:lnB>
+                    <a:noFill/>
+                  </a:tcPr>
+                </a:tc>
+                <a:extLst>
+                  <a:ext uri="{0D108BD9-81ED-4DB2-BD59-A6C34878D82A}">
+                    <a16:rowId xmlns:a16="http://schemas.microsoft.com/office/drawing/2014/main" val="3519795046"/>
+                  </a:ext>
+                </a:extLst>
+              </a:tr>
+              <a:tr h="200391">
+                <a:tc>
+                  <a:txBody>
+                    <a:bodyPr/>
+                    <a:lstStyle/>
+                    <a:p>
+                      <a:pPr algn="ctr"/>
+                      <a:r>
+                        <a:rPr lang="en-US" sz="800" dirty="0"/>
+                        <a:t>Manufacturing</a:t>
+                      </a:r>
+                    </a:p>
+                  </a:txBody>
+                  <a:tcPr anchor="ctr">
+                    <a:lnL>
+                      <a:noFill/>
+                    </a:lnL>
+                    <a:lnR>
+                      <a:noFill/>
+                    </a:lnR>
+                    <a:lnT>
+                      <a:noFill/>
+                    </a:lnT>
+                    <a:lnB>
+                      <a:noFill/>
+                    </a:lnB>
+                    <a:noFill/>
+                  </a:tcPr>
+                </a:tc>
+                <a:tc>
+                  <a:txBody>
+                    <a:bodyPr/>
+                    <a:lstStyle/>
+                    <a:p>
+                      <a:pPr algn="ctr"/>
+                      <a:r>
+                        <a:rPr lang="en-US" sz="800" dirty="0"/>
+                        <a:t>220,012</a:t>
+                      </a:r>
+                    </a:p>
+                  </a:txBody>
+                  <a:tcPr anchor="ctr">
+                    <a:lnL>
+                      <a:noFill/>
+                    </a:lnL>
+                    <a:lnR>
+                      <a:noFill/>
+                    </a:lnR>
+                    <a:lnT>
+                      <a:noFill/>
+                    </a:lnT>
+                    <a:lnB>
+                      <a:noFill/>
+                    </a:lnB>
+                    <a:noFill/>
+                  </a:tcPr>
+                </a:tc>
+                <a:extLst>
+                  <a:ext uri="{0D108BD9-81ED-4DB2-BD59-A6C34878D82A}">
+                    <a16:rowId xmlns:a16="http://schemas.microsoft.com/office/drawing/2014/main" val="3084213761"/>
+                  </a:ext>
+                </a:extLst>
+              </a:tr>
+              <a:tr h="200391">
+                <a:tc>
+                  <a:txBody>
+                    <a:bodyPr/>
+                    <a:lstStyle/>
+                    <a:p>
+                      <a:pPr algn="ctr"/>
+                      <a:r>
+                        <a:rPr lang="en-US" sz="800"/>
+                        <a:t>Health</a:t>
+                      </a:r>
+                    </a:p>
+                  </a:txBody>
+                  <a:tcPr anchor="ctr">
+                    <a:lnL>
+                      <a:noFill/>
+                    </a:lnL>
+                    <a:lnR>
+                      <a:noFill/>
+                    </a:lnR>
+                    <a:lnT>
+                      <a:noFill/>
+                    </a:lnT>
+                    <a:lnB>
+                      <a:noFill/>
+                    </a:lnB>
+                    <a:noFill/>
+                  </a:tcPr>
+                </a:tc>
+                <a:tc>
+                  <a:txBody>
+                    <a:bodyPr/>
+                    <a:lstStyle/>
+                    <a:p>
+                      <a:pPr algn="ctr"/>
+                      <a:r>
+                        <a:rPr lang="en-US" sz="800" dirty="0"/>
+                        <a:t>198,846</a:t>
+                      </a:r>
+                    </a:p>
+                  </a:txBody>
+                  <a:tcPr anchor="ctr">
+                    <a:lnL>
+                      <a:noFill/>
+                    </a:lnL>
+                    <a:lnR>
+                      <a:noFill/>
+                    </a:lnR>
+                    <a:lnT>
+                      <a:noFill/>
+                    </a:lnT>
+                    <a:lnB>
+                      <a:noFill/>
+                    </a:lnB>
+                    <a:noFill/>
+                  </a:tcPr>
+                </a:tc>
+                <a:extLst>
+                  <a:ext uri="{0D108BD9-81ED-4DB2-BD59-A6C34878D82A}">
+                    <a16:rowId xmlns:a16="http://schemas.microsoft.com/office/drawing/2014/main" val="3138555149"/>
+                  </a:ext>
+                </a:extLst>
+              </a:tr>
+              <a:tr h="200391">
+                <a:tc>
+                  <a:txBody>
+                    <a:bodyPr/>
+                    <a:lstStyle/>
+                    <a:p>
+                      <a:pPr algn="ctr"/>
+                      <a:r>
+                        <a:rPr lang="en-US" sz="800"/>
+                        <a:t>Retail</a:t>
+                      </a:r>
+                    </a:p>
+                  </a:txBody>
+                  <a:tcPr anchor="ctr">
+                    <a:lnL>
+                      <a:noFill/>
+                    </a:lnL>
+                    <a:lnR>
+                      <a:noFill/>
+                    </a:lnR>
+                    <a:lnT>
+                      <a:noFill/>
+                    </a:lnT>
+                    <a:lnB>
+                      <a:noFill/>
+                    </a:lnB>
+                    <a:noFill/>
+                  </a:tcPr>
+                </a:tc>
+                <a:tc>
+                  <a:txBody>
+                    <a:bodyPr/>
+                    <a:lstStyle/>
+                    <a:p>
+                      <a:pPr algn="ctr"/>
+                      <a:r>
+                        <a:rPr lang="en-US" sz="800"/>
+                        <a:t>179,602</a:t>
+                      </a:r>
+                    </a:p>
+                  </a:txBody>
+                  <a:tcPr anchor="ctr">
+                    <a:lnL>
+                      <a:noFill/>
+                    </a:lnL>
+                    <a:lnR>
+                      <a:noFill/>
+                    </a:lnR>
+                    <a:lnT>
+                      <a:noFill/>
+                    </a:lnT>
+                    <a:lnB>
+                      <a:noFill/>
+                    </a:lnB>
+                    <a:noFill/>
+                  </a:tcPr>
+                </a:tc>
+                <a:extLst>
+                  <a:ext uri="{0D108BD9-81ED-4DB2-BD59-A6C34878D82A}">
+                    <a16:rowId xmlns:a16="http://schemas.microsoft.com/office/drawing/2014/main" val="1386129193"/>
+                  </a:ext>
+                </a:extLst>
+              </a:tr>
+              <a:tr h="200391">
+                <a:tc>
+                  <a:txBody>
+                    <a:bodyPr/>
+                    <a:lstStyle/>
+                    <a:p>
+                      <a:pPr algn="ctr"/>
+                      <a:r>
+                        <a:rPr lang="en-US" sz="800"/>
+                        <a:t>IT</a:t>
+                      </a:r>
+                    </a:p>
+                  </a:txBody>
+                  <a:tcPr anchor="ctr">
+                    <a:lnL>
+                      <a:noFill/>
+                    </a:lnL>
+                    <a:lnR>
+                      <a:noFill/>
+                    </a:lnR>
+                    <a:lnT>
+                      <a:noFill/>
+                    </a:lnT>
+                    <a:lnB>
+                      <a:noFill/>
+                    </a:lnB>
+                    <a:noFill/>
+                  </a:tcPr>
+                </a:tc>
+                <a:tc>
+                  <a:txBody>
+                    <a:bodyPr/>
+                    <a:lstStyle/>
+                    <a:p>
+                      <a:pPr algn="ctr"/>
+                      <a:r>
+                        <a:rPr lang="en-US" sz="800" dirty="0"/>
+                        <a:t>66,409</a:t>
+                      </a:r>
+                    </a:p>
+                  </a:txBody>
+                  <a:tcPr anchor="ctr">
+                    <a:lnL>
+                      <a:noFill/>
+                    </a:lnL>
+                    <a:lnR>
+                      <a:noFill/>
+                    </a:lnR>
+                    <a:lnT>
+                      <a:noFill/>
+                    </a:lnT>
+                    <a:lnB>
+                      <a:noFill/>
+                    </a:lnB>
+                    <a:noFill/>
+                  </a:tcPr>
+                </a:tc>
+                <a:extLst>
+                  <a:ext uri="{0D108BD9-81ED-4DB2-BD59-A6C34878D82A}">
+                    <a16:rowId xmlns:a16="http://schemas.microsoft.com/office/drawing/2014/main" val="1843853941"/>
+                  </a:ext>
+                </a:extLst>
+              </a:tr>
+            </a:tbl>
+          </a:graphicData>
+        </a:graphic>
+      </p:graphicFrame>
+      <p:sp>
+        <p:nvSpPr>
+          <p:cNvPr id="26" name="Rectangle 13">
+            <a:extLst>
+              <a:ext uri="{FF2B5EF4-FFF2-40B4-BE49-F238E27FC236}">
+                <a16:creationId xmlns:a16="http://schemas.microsoft.com/office/drawing/2014/main" id="{8482C798-0E26-D9BB-825A-DE8009ECC61B}"/>
+              </a:ext>
+            </a:extLst>
+          </p:cNvPr>
+          <p:cNvSpPr>
+            <a:spLocks noChangeArrowheads="1"/>
+          </p:cNvSpPr>
+          <p:nvPr/>
+        </p:nvSpPr>
+        <p:spPr bwMode="auto">
+          <a:xfrm>
+            <a:off x="179358" y="2665326"/>
+            <a:ext cx="3152050" cy="1323439"/>
+          </a:xfrm>
+          <a:prstGeom prst="rect">
+            <a:avLst/>
+          </a:prstGeom>
+          <a:noFill/>
+          <a:ln>
+            <a:noFill/>
+          </a:ln>
+          <a:effectLst/>
+          <a:extLst>
+            <a:ext uri="{909E8E84-426E-40DD-AFC4-6F175D3DCCD1}">
+              <a14:hiddenFill xmlns:a14="http://schemas.microsoft.com/office/drawing/2010/main">
+                <a:solidFill>
+                  <a:schemeClr val="accent1"/>
+                </a:solidFill>
+              </a14:hiddenFill>
+            </a:ext>
+            <a:ext uri="{91240B29-F687-4F45-9708-019B960494DF}">
+              <a14:hiddenLine xmlns:a14="http://schemas.microsoft.com/office/drawing/2010/main" w="9525">
+                <a:solidFill>
+                  <a:schemeClr val="tx1"/>
+                </a:solidFill>
+                <a:miter lim="800000"/>
+                <a:headEnd/>
+                <a:tailEnd/>
+              </a14:hiddenLine>
+            </a:ext>
+            <a:ext uri="{AF507438-7753-43E0-B8FC-AC1667EBCBE1}">
+              <a14:hiddenEffects xmlns:a14="http://schemas.microsoft.com/office/drawing/2010/main">
+                <a:effectLst>
+                  <a:outerShdw dist="35921" dir="2700000" algn="ctr" rotWithShape="0">
+                    <a:schemeClr val="bg2"/>
+                  </a:outerShdw>
+                </a:effectLst>
+              </a14:hiddenEffects>
+            </a:ext>
+          </a:extLst>
+        </p:spPr>
+        <p:txBody>
+          <a:bodyPr vert="horz" wrap="square" lIns="91440" tIns="45720" rIns="91440" bIns="45720" numCol="1" anchor="ctr" anchorCtr="0" compatLnSpc="1">
+            <a:prstTxWarp prst="textNoShape">
+              <a:avLst/>
+            </a:prstTxWarp>
+            <a:spAutoFit/>
+          </a:bodyPr>
+          <a:lstStyle/>
+          <a:p>
+            <a:pPr marL="0" marR="0" lvl="0" indent="0" algn="l" defTabSz="914400" rtl="0" eaLnBrk="0" fontAlgn="base" latinLnBrk="0" hangingPunct="0">
+              <a:lnSpc>
+                <a:spcPct val="100000"/>
+              </a:lnSpc>
+              <a:spcBef>
+                <a:spcPct val="0"/>
+              </a:spcBef>
+              <a:spcAft>
+                <a:spcPct val="0"/>
+              </a:spcAft>
+              <a:buClrTx/>
+              <a:buSzTx/>
+              <a:buFontTx/>
+              <a:buNone/>
+              <a:tabLst/>
+            </a:pPr>
+            <a:r>
+              <a:rPr kumimoji="0" lang="en-US" altLang="en-US" sz="1000" b="1" i="0" u="none" strike="noStrike" cap="none" normalizeH="0" baseline="0" dirty="0">
+                <a:ln>
+                  <a:noFill/>
+                </a:ln>
+                <a:solidFill>
+                  <a:schemeClr val="tx1"/>
+                </a:solidFill>
+                <a:effectLst/>
+                <a:latin typeface="Arial" panose="020B0604020202020204" pitchFamily="34" charset="0"/>
+              </a:rPr>
+              <a:t>Top Performing Job Industries (across all segments)</a:t>
+            </a:r>
+          </a:p>
+          <a:p>
+            <a:pPr marL="0" marR="0" lvl="0" indent="0" algn="l" defTabSz="914400" rtl="0" eaLnBrk="0" fontAlgn="base" latinLnBrk="0" hangingPunct="0">
+              <a:lnSpc>
+                <a:spcPct val="100000"/>
+              </a:lnSpc>
+              <a:spcBef>
+                <a:spcPct val="0"/>
+              </a:spcBef>
+              <a:spcAft>
+                <a:spcPct val="0"/>
+              </a:spcAft>
+              <a:buClrTx/>
+              <a:buSzTx/>
+              <a:buFontTx/>
+              <a:buNone/>
+              <a:tabLst/>
+            </a:pPr>
+            <a:r>
+              <a:rPr kumimoji="0" lang="en-US" altLang="en-US" sz="1000" b="1" i="0" u="none" strike="noStrike" cap="none" normalizeH="0" baseline="0" dirty="0">
+                <a:ln>
+                  <a:noFill/>
+                </a:ln>
+                <a:solidFill>
+                  <a:schemeClr val="tx1"/>
+                </a:solidFill>
+                <a:effectLst/>
+                <a:latin typeface="Arial" panose="020B0604020202020204" pitchFamily="34" charset="0"/>
+              </a:rPr>
+              <a:t>Recommendation</a:t>
+            </a:r>
+            <a:r>
+              <a:rPr kumimoji="0" lang="en-US" altLang="en-US" sz="1000" b="0" i="0" u="none" strike="noStrike" cap="none" normalizeH="0" baseline="0" dirty="0">
+                <a:ln>
+                  <a:noFill/>
+                </a:ln>
+                <a:solidFill>
+                  <a:schemeClr val="tx1"/>
+                </a:solidFill>
+                <a:effectLst/>
+                <a:latin typeface="Arial" panose="020B0604020202020204" pitchFamily="34" charset="0"/>
+              </a:rPr>
+              <a:t>:</a:t>
+            </a:r>
+          </a:p>
+          <a:p>
+            <a:pPr marL="0" marR="0" lvl="0" indent="0" algn="l" defTabSz="914400" rtl="0" eaLnBrk="0" fontAlgn="base" latinLnBrk="0" hangingPunct="0">
+              <a:lnSpc>
+                <a:spcPct val="100000"/>
+              </a:lnSpc>
+              <a:spcBef>
+                <a:spcPct val="0"/>
+              </a:spcBef>
+              <a:spcAft>
+                <a:spcPct val="0"/>
+              </a:spcAft>
+              <a:buClrTx/>
+              <a:buSzTx/>
+              <a:buFontTx/>
               <a:buChar char="•"/>
+              <a:tabLst/>
             </a:pPr>
             <a:r>
-              <a:rPr lang="en-US" sz="900" b="1" dirty="0"/>
-              <a:t>Insight</a:t>
-            </a:r>
-            <a:r>
-              <a:rPr lang="en-US" sz="900" dirty="0"/>
-              <a:t>: VIP treatment — early product releases, personalized offers. Leverage their online preference.</a:t>
-            </a:r>
-          </a:p>
-          <a:p>
-            <a:pPr>
+              <a:rPr kumimoji="0" lang="en-US" altLang="en-US" sz="1000" b="0" i="0" u="none" strike="noStrike" cap="none" normalizeH="0" baseline="0" dirty="0">
+                <a:ln>
+                  <a:noFill/>
+                </a:ln>
+                <a:solidFill>
+                  <a:schemeClr val="tx1"/>
+                </a:solidFill>
+                <a:effectLst/>
+                <a:latin typeface="Arial" panose="020B0604020202020204" pitchFamily="34" charset="0"/>
+              </a:rPr>
+              <a:t>Tailor B2B marketing and partnerships towards </a:t>
+            </a:r>
+            <a:r>
+              <a:rPr kumimoji="0" lang="en-US" altLang="en-US" sz="1000" b="1" i="0" u="none" strike="noStrike" cap="none" normalizeH="0" baseline="0" dirty="0">
+                <a:ln>
+                  <a:noFill/>
+                </a:ln>
+                <a:solidFill>
+                  <a:schemeClr val="tx1"/>
+                </a:solidFill>
+                <a:effectLst/>
+                <a:latin typeface="Arial" panose="020B0604020202020204" pitchFamily="34" charset="0"/>
+              </a:rPr>
+              <a:t>financial, manufacturing, and health industries</a:t>
+            </a:r>
+            <a:r>
+              <a:rPr kumimoji="0" lang="en-US" altLang="en-US" sz="1000" b="0" i="0" u="none" strike="noStrike" cap="none" normalizeH="0" baseline="0" dirty="0">
+                <a:ln>
+                  <a:noFill/>
+                </a:ln>
+                <a:solidFill>
+                  <a:schemeClr val="tx1"/>
+                </a:solidFill>
+                <a:effectLst/>
+                <a:latin typeface="Arial" panose="020B0604020202020204" pitchFamily="34" charset="0"/>
+              </a:rPr>
+              <a:t>.</a:t>
+            </a:r>
+          </a:p>
+          <a:p>
+            <a:pPr marL="0" marR="0" lvl="0" indent="0" algn="l" defTabSz="914400" rtl="0" eaLnBrk="0" fontAlgn="base" latinLnBrk="0" hangingPunct="0">
+              <a:lnSpc>
+                <a:spcPct val="100000"/>
+              </a:lnSpc>
+              <a:spcBef>
+                <a:spcPct val="0"/>
+              </a:spcBef>
+              <a:spcAft>
+                <a:spcPct val="0"/>
+              </a:spcAft>
+              <a:buClrTx/>
+              <a:buSzTx/>
+              <a:buFontTx/>
+              <a:buChar char="•"/>
+              <a:tabLst/>
+            </a:pPr>
+            <a:r>
+              <a:rPr kumimoji="0" lang="en-US" altLang="en-US" sz="1000" b="0" i="0" u="none" strike="noStrike" cap="none" normalizeH="0" baseline="0" dirty="0">
+                <a:ln>
+                  <a:noFill/>
+                </a:ln>
+                <a:solidFill>
+                  <a:schemeClr val="tx1"/>
+                </a:solidFill>
+                <a:effectLst/>
+                <a:latin typeface="Arial" panose="020B0604020202020204" pitchFamily="34" charset="0"/>
+              </a:rPr>
+              <a:t>Consider exclusive campaigns for </a:t>
+            </a:r>
+            <a:r>
+              <a:rPr kumimoji="0" lang="en-US" altLang="en-US" sz="1000" b="1" i="0" u="none" strike="noStrike" cap="none" normalizeH="0" baseline="0" dirty="0">
+                <a:ln>
+                  <a:noFill/>
+                </a:ln>
+                <a:solidFill>
+                  <a:schemeClr val="tx1"/>
+                </a:solidFill>
+                <a:effectLst/>
+                <a:latin typeface="Arial" panose="020B0604020202020204" pitchFamily="34" charset="0"/>
+              </a:rPr>
+              <a:t>Retail</a:t>
+            </a:r>
+            <a:r>
+              <a:rPr kumimoji="0" lang="en-US" altLang="en-US" sz="1000" b="0" i="0" u="none" strike="noStrike" cap="none" normalizeH="0" baseline="0" dirty="0">
+                <a:ln>
+                  <a:noFill/>
+                </a:ln>
+                <a:solidFill>
+                  <a:schemeClr val="tx1"/>
+                </a:solidFill>
+                <a:effectLst/>
+                <a:latin typeface="Arial" panose="020B0604020202020204" pitchFamily="34" charset="0"/>
+              </a:rPr>
+              <a:t> and </a:t>
+            </a:r>
+            <a:r>
+              <a:rPr kumimoji="0" lang="en-US" altLang="en-US" sz="1000" b="1" i="0" u="none" strike="noStrike" cap="none" normalizeH="0" baseline="0" dirty="0">
+                <a:ln>
+                  <a:noFill/>
+                </a:ln>
+                <a:solidFill>
+                  <a:schemeClr val="tx1"/>
+                </a:solidFill>
+                <a:effectLst/>
+                <a:latin typeface="Arial" panose="020B0604020202020204" pitchFamily="34" charset="0"/>
+              </a:rPr>
+              <a:t>IT professionals</a:t>
+            </a:r>
+            <a:r>
+              <a:rPr kumimoji="0" lang="en-US" altLang="en-US" sz="1000" b="0" i="0" u="none" strike="noStrike" cap="none" normalizeH="0" baseline="0" dirty="0">
+                <a:ln>
+                  <a:noFill/>
+                </a:ln>
+                <a:solidFill>
+                  <a:schemeClr val="tx1"/>
+                </a:solidFill>
+                <a:effectLst/>
+                <a:latin typeface="Arial" panose="020B0604020202020204" pitchFamily="34" charset="0"/>
+              </a:rPr>
+              <a:t>, which are also strong performers.</a:t>
+            </a:r>
+          </a:p>
+          <a:p>
+            <a:pPr marL="0" marR="0" lvl="0" indent="0" algn="l" defTabSz="914400" rtl="0" eaLnBrk="0" fontAlgn="base" latinLnBrk="0" hangingPunct="0">
+              <a:lnSpc>
+                <a:spcPct val="100000"/>
+              </a:lnSpc>
+              <a:spcBef>
+                <a:spcPct val="0"/>
+              </a:spcBef>
+              <a:spcAft>
+                <a:spcPct val="0"/>
+              </a:spcAft>
+              <a:buClrTx/>
+              <a:buSzTx/>
+              <a:buFontTx/>
               <a:buNone/>
+              <a:tabLst/>
             </a:pPr>
-            <a:r>
-              <a:rPr lang="en-US" sz="900" b="1" dirty="0">
-                <a:highlight>
-                  <a:srgbClr val="FFFF00"/>
-                </a:highlight>
-              </a:rPr>
-              <a:t>Lost / Unclassified / Can't Lose Them</a:t>
-            </a:r>
-          </a:p>
-          <a:p>
-            <a:pPr>
-              <a:buFont typeface="Arial" panose="020B0604020202020204" pitchFamily="34" charset="0"/>
+            <a:endParaRPr kumimoji="0" lang="en-US" altLang="en-US" sz="1000" b="0" i="0" u="none" strike="noStrike" cap="none" normalizeH="0" baseline="0" dirty="0">
+              <a:ln>
+                <a:noFill/>
+              </a:ln>
+              <a:solidFill>
+                <a:schemeClr val="tx1"/>
+              </a:solidFill>
+              <a:effectLst/>
+              <a:latin typeface="Arial" panose="020B0604020202020204" pitchFamily="34" charset="0"/>
+            </a:endParaRPr>
+          </a:p>
+        </p:txBody>
+      </p:sp>
+      <p:sp>
+        <p:nvSpPr>
+          <p:cNvPr id="30" name="Rectangle 17">
+            <a:extLst>
+              <a:ext uri="{FF2B5EF4-FFF2-40B4-BE49-F238E27FC236}">
+                <a16:creationId xmlns:a16="http://schemas.microsoft.com/office/drawing/2014/main" id="{3ADDAF95-99D9-F036-1189-08677EDAF722}"/>
+              </a:ext>
+            </a:extLst>
+          </p:cNvPr>
+          <p:cNvSpPr>
+            <a:spLocks noChangeArrowheads="1"/>
+          </p:cNvSpPr>
+          <p:nvPr/>
+        </p:nvSpPr>
+        <p:spPr bwMode="auto">
+          <a:xfrm>
+            <a:off x="3377543" y="3062313"/>
+            <a:ext cx="5694188" cy="1323439"/>
+          </a:xfrm>
+          <a:prstGeom prst="rect">
+            <a:avLst/>
+          </a:prstGeom>
+          <a:noFill/>
+          <a:ln>
+            <a:noFill/>
+          </a:ln>
+          <a:effectLst/>
+          <a:extLst>
+            <a:ext uri="{909E8E84-426E-40DD-AFC4-6F175D3DCCD1}">
+              <a14:hiddenFill xmlns:a14="http://schemas.microsoft.com/office/drawing/2010/main">
+                <a:solidFill>
+                  <a:schemeClr val="accent1"/>
+                </a:solidFill>
+              </a14:hiddenFill>
+            </a:ext>
+            <a:ext uri="{91240B29-F687-4F45-9708-019B960494DF}">
+              <a14:hiddenLine xmlns:a14="http://schemas.microsoft.com/office/drawing/2010/main" w="9525">
+                <a:solidFill>
+                  <a:schemeClr val="tx1"/>
+                </a:solidFill>
+                <a:miter lim="800000"/>
+                <a:headEnd/>
+                <a:tailEnd/>
+              </a14:hiddenLine>
+            </a:ext>
+            <a:ext uri="{AF507438-7753-43E0-B8FC-AC1667EBCBE1}">
+              <a14:hiddenEffects xmlns:a14="http://schemas.microsoft.com/office/drawing/2010/main">
+                <a:effectLst>
+                  <a:outerShdw dist="35921" dir="2700000" algn="ctr" rotWithShape="0">
+                    <a:schemeClr val="bg2"/>
+                  </a:outerShdw>
+                </a:effectLst>
+              </a14:hiddenEffects>
+            </a:ext>
+          </a:extLst>
+        </p:spPr>
+        <p:txBody>
+          <a:bodyPr vert="horz" wrap="none" lIns="91440" tIns="45720" rIns="91440" bIns="45720" numCol="1" anchor="ctr" anchorCtr="0" compatLnSpc="1">
+            <a:prstTxWarp prst="textNoShape">
+              <a:avLst/>
+            </a:prstTxWarp>
+            <a:spAutoFit/>
+          </a:bodyPr>
+          <a:lstStyle/>
+          <a:p>
+            <a:pPr marL="0" marR="0" lvl="0" indent="0" algn="l" defTabSz="914400" rtl="0" eaLnBrk="0" fontAlgn="base" latinLnBrk="0" hangingPunct="0">
+              <a:lnSpc>
+                <a:spcPct val="100000"/>
+              </a:lnSpc>
+              <a:spcBef>
+                <a:spcPct val="0"/>
+              </a:spcBef>
+              <a:spcAft>
+                <a:spcPct val="0"/>
+              </a:spcAft>
+              <a:buClrTx/>
+              <a:buSzTx/>
+              <a:buFontTx/>
+              <a:buNone/>
+              <a:tabLst/>
+            </a:pPr>
+            <a:r>
+              <a:rPr kumimoji="0" lang="en-US" altLang="en-US" sz="1000" b="1" i="0" u="none" strike="noStrike" cap="none" normalizeH="0" baseline="0" dirty="0">
+                <a:ln>
+                  <a:noFill/>
+                </a:ln>
+                <a:solidFill>
+                  <a:schemeClr val="tx1"/>
+                </a:solidFill>
+                <a:effectLst/>
+                <a:latin typeface="Arial" panose="020B0604020202020204" pitchFamily="34" charset="0"/>
+              </a:rPr>
+              <a:t>Age Profile by Segment</a:t>
+            </a:r>
+          </a:p>
+          <a:p>
+            <a:pPr marL="0" marR="0" lvl="0" indent="0" algn="l" defTabSz="914400" rtl="0" eaLnBrk="0" fontAlgn="base" latinLnBrk="0" hangingPunct="0">
+              <a:lnSpc>
+                <a:spcPct val="100000"/>
+              </a:lnSpc>
+              <a:spcBef>
+                <a:spcPct val="0"/>
+              </a:spcBef>
+              <a:spcAft>
+                <a:spcPct val="0"/>
+              </a:spcAft>
+              <a:buClrTx/>
+              <a:buSzTx/>
+              <a:buFontTx/>
               <a:buChar char="•"/>
+              <a:tabLst/>
             </a:pPr>
             <a:r>
-              <a:rPr lang="en-US" sz="900" b="1" dirty="0"/>
+              <a:rPr kumimoji="0" lang="en-US" altLang="en-US" sz="1000" b="1" i="0" u="none" strike="noStrike" cap="none" normalizeH="0" baseline="0" dirty="0">
+                <a:ln>
+                  <a:noFill/>
+                </a:ln>
+                <a:solidFill>
+                  <a:schemeClr val="tx1"/>
+                </a:solidFill>
+                <a:effectLst/>
+                <a:latin typeface="Arial" panose="020B0604020202020204" pitchFamily="34" charset="0"/>
+              </a:rPr>
+              <a:t>Younger segments</a:t>
+            </a:r>
+            <a:r>
+              <a:rPr kumimoji="0" lang="en-US" altLang="en-US" sz="1000" b="0" i="0" u="none" strike="noStrike" cap="none" normalizeH="0" baseline="0" dirty="0">
+                <a:ln>
+                  <a:noFill/>
+                </a:ln>
+                <a:solidFill>
+                  <a:schemeClr val="tx1"/>
+                </a:solidFill>
+                <a:effectLst/>
+                <a:latin typeface="Arial" panose="020B0604020202020204" pitchFamily="34" charset="0"/>
+              </a:rPr>
+              <a:t> (e.g. </a:t>
+            </a:r>
+            <a:r>
+              <a:rPr kumimoji="0" lang="en-US" altLang="en-US" sz="1000" b="0" i="1" u="none" strike="noStrike" cap="none" normalizeH="0" baseline="0" dirty="0">
+                <a:ln>
+                  <a:noFill/>
+                </a:ln>
+                <a:solidFill>
+                  <a:schemeClr val="tx1"/>
+                </a:solidFill>
+                <a:effectLst/>
+                <a:latin typeface="Arial" panose="020B0604020202020204" pitchFamily="34" charset="0"/>
+              </a:rPr>
+              <a:t>Recent Customers</a:t>
+            </a:r>
+            <a:r>
+              <a:rPr kumimoji="0" lang="en-US" altLang="en-US" sz="1000" b="0" i="0" u="none" strike="noStrike" cap="none" normalizeH="0" baseline="0" dirty="0">
+                <a:ln>
+                  <a:noFill/>
+                </a:ln>
+                <a:solidFill>
+                  <a:schemeClr val="tx1"/>
+                </a:solidFill>
+                <a:effectLst/>
+                <a:latin typeface="Arial" panose="020B0604020202020204" pitchFamily="34" charset="0"/>
+              </a:rPr>
+              <a:t>, </a:t>
+            </a:r>
+            <a:r>
+              <a:rPr kumimoji="0" lang="en-US" altLang="en-US" sz="1000" b="0" i="1" u="none" strike="noStrike" cap="none" normalizeH="0" baseline="0" dirty="0">
+                <a:ln>
+                  <a:noFill/>
+                </a:ln>
+                <a:solidFill>
+                  <a:schemeClr val="tx1"/>
+                </a:solidFill>
+                <a:effectLst/>
+                <a:latin typeface="Arial" panose="020B0604020202020204" pitchFamily="34" charset="0"/>
+              </a:rPr>
+              <a:t>Promising</a:t>
+            </a:r>
+            <a:r>
+              <a:rPr kumimoji="0" lang="en-US" altLang="en-US" sz="1000" b="0" i="0" u="none" strike="noStrike" cap="none" normalizeH="0" baseline="0" dirty="0">
+                <a:ln>
+                  <a:noFill/>
+                </a:ln>
+                <a:solidFill>
+                  <a:schemeClr val="tx1"/>
+                </a:solidFill>
+                <a:effectLst/>
+                <a:latin typeface="Arial" panose="020B0604020202020204" pitchFamily="34" charset="0"/>
+              </a:rPr>
+              <a:t>, </a:t>
+            </a:r>
+            <a:r>
+              <a:rPr kumimoji="0" lang="en-US" altLang="en-US" sz="1000" b="0" i="1" u="none" strike="noStrike" cap="none" normalizeH="0" baseline="0" dirty="0">
+                <a:ln>
+                  <a:noFill/>
+                </a:ln>
+                <a:solidFill>
+                  <a:schemeClr val="tx1"/>
+                </a:solidFill>
+                <a:effectLst/>
+                <a:latin typeface="Arial" panose="020B0604020202020204" pitchFamily="34" charset="0"/>
+              </a:rPr>
               <a:t>Lost</a:t>
             </a:r>
             <a:r>
-              <a:rPr lang="en-US" sz="900" dirty="0"/>
-              <a:t>: Tiny impact (0.19%) | Older &amp; offline (52%)</a:t>
-            </a:r>
-          </a:p>
-          <a:p>
-            <a:pPr>
-              <a:buFont typeface="Arial" panose="020B0604020202020204" pitchFamily="34" charset="0"/>
+              <a:rPr kumimoji="0" lang="en-US" altLang="en-US" sz="1000" b="0" i="0" u="none" strike="noStrike" cap="none" normalizeH="0" baseline="0" dirty="0">
+                <a:ln>
+                  <a:noFill/>
+                </a:ln>
+                <a:solidFill>
+                  <a:schemeClr val="tx1"/>
+                </a:solidFill>
+                <a:effectLst/>
+                <a:latin typeface="Arial" panose="020B0604020202020204" pitchFamily="34" charset="0"/>
+              </a:rPr>
+              <a:t>) have average ages around </a:t>
+            </a:r>
+            <a:r>
+              <a:rPr kumimoji="0" lang="en-US" altLang="en-US" sz="1000" b="1" i="0" u="none" strike="noStrike" cap="none" normalizeH="0" baseline="0" dirty="0">
+                <a:ln>
+                  <a:noFill/>
+                </a:ln>
+                <a:solidFill>
+                  <a:schemeClr val="tx1"/>
+                </a:solidFill>
+                <a:effectLst/>
+                <a:latin typeface="Arial" panose="020B0604020202020204" pitchFamily="34" charset="0"/>
+              </a:rPr>
+              <a:t>43–45</a:t>
+            </a:r>
+            <a:endParaRPr kumimoji="0" lang="en-US" altLang="en-US" sz="1000" b="0" i="0" u="none" strike="noStrike" cap="none" normalizeH="0" baseline="0" dirty="0">
+              <a:ln>
+                <a:noFill/>
+              </a:ln>
+              <a:solidFill>
+                <a:schemeClr val="tx1"/>
+              </a:solidFill>
+              <a:effectLst/>
+              <a:latin typeface="Arial" panose="020B0604020202020204" pitchFamily="34" charset="0"/>
+            </a:endParaRPr>
+          </a:p>
+          <a:p>
+            <a:pPr marL="0" marR="0" lvl="0" indent="0" algn="l" defTabSz="914400" rtl="0" eaLnBrk="0" fontAlgn="base" latinLnBrk="0" hangingPunct="0">
+              <a:lnSpc>
+                <a:spcPct val="100000"/>
+              </a:lnSpc>
+              <a:spcBef>
+                <a:spcPct val="0"/>
+              </a:spcBef>
+              <a:spcAft>
+                <a:spcPct val="0"/>
+              </a:spcAft>
+              <a:buClrTx/>
+              <a:buSzTx/>
+              <a:buFontTx/>
               <a:buChar char="•"/>
+              <a:tabLst/>
             </a:pPr>
             <a:r>
-              <a:rPr lang="en-US" sz="900" b="1" dirty="0"/>
-              <a:t>Can't Lose Them</a:t>
-            </a:r>
-            <a:r>
-              <a:rPr lang="en-US" sz="900" dirty="0"/>
-              <a:t>: Valuable but disengaging</a:t>
-            </a:r>
-          </a:p>
-          <a:p>
-            <a:pPr>
-              <a:buFont typeface="Arial" panose="020B0604020202020204" pitchFamily="34" charset="0"/>
+              <a:rPr kumimoji="0" lang="en-US" altLang="en-US" sz="1000" b="1" i="0" u="none" strike="noStrike" cap="none" normalizeH="0" baseline="0" dirty="0">
+                <a:ln>
+                  <a:noFill/>
+                </a:ln>
+                <a:solidFill>
+                  <a:schemeClr val="tx1"/>
+                </a:solidFill>
+                <a:effectLst/>
+                <a:latin typeface="Arial" panose="020B0604020202020204" pitchFamily="34" charset="0"/>
+              </a:rPr>
+              <a:t>Older segments</a:t>
+            </a:r>
+            <a:r>
+              <a:rPr kumimoji="0" lang="en-US" altLang="en-US" sz="1000" b="0" i="0" u="none" strike="noStrike" cap="none" normalizeH="0" baseline="0" dirty="0">
+                <a:ln>
+                  <a:noFill/>
+                </a:ln>
+                <a:solidFill>
+                  <a:schemeClr val="tx1"/>
+                </a:solidFill>
+                <a:effectLst/>
+                <a:latin typeface="Arial" panose="020B0604020202020204" pitchFamily="34" charset="0"/>
+              </a:rPr>
+              <a:t> (e.g. </a:t>
+            </a:r>
+            <a:r>
+              <a:rPr kumimoji="0" lang="en-US" altLang="en-US" sz="1000" b="0" i="1" u="none" strike="noStrike" cap="none" normalizeH="0" baseline="0" dirty="0">
+                <a:ln>
+                  <a:noFill/>
+                </a:ln>
+                <a:solidFill>
+                  <a:schemeClr val="tx1"/>
+                </a:solidFill>
+                <a:effectLst/>
+                <a:latin typeface="Arial" panose="020B0604020202020204" pitchFamily="34" charset="0"/>
+              </a:rPr>
+              <a:t>Champions</a:t>
+            </a:r>
+            <a:r>
+              <a:rPr kumimoji="0" lang="en-US" altLang="en-US" sz="1000" b="0" i="0" u="none" strike="noStrike" cap="none" normalizeH="0" baseline="0" dirty="0">
+                <a:ln>
+                  <a:noFill/>
+                </a:ln>
+                <a:solidFill>
+                  <a:schemeClr val="tx1"/>
+                </a:solidFill>
+                <a:effectLst/>
+                <a:latin typeface="Arial" panose="020B0604020202020204" pitchFamily="34" charset="0"/>
+              </a:rPr>
+              <a:t>, </a:t>
+            </a:r>
+            <a:r>
+              <a:rPr kumimoji="0" lang="en-US" altLang="en-US" sz="1000" b="0" i="1" u="none" strike="noStrike" cap="none" normalizeH="0" baseline="0" dirty="0">
+                <a:ln>
+                  <a:noFill/>
+                </a:ln>
+                <a:solidFill>
+                  <a:schemeClr val="tx1"/>
+                </a:solidFill>
+                <a:effectLst/>
+                <a:latin typeface="Arial" panose="020B0604020202020204" pitchFamily="34" charset="0"/>
+              </a:rPr>
+              <a:t>Hibernating</a:t>
+            </a:r>
+            <a:r>
+              <a:rPr kumimoji="0" lang="en-US" altLang="en-US" sz="1000" b="0" i="0" u="none" strike="noStrike" cap="none" normalizeH="0" baseline="0" dirty="0">
+                <a:ln>
+                  <a:noFill/>
+                </a:ln>
+                <a:solidFill>
+                  <a:schemeClr val="tx1"/>
+                </a:solidFill>
+                <a:effectLst/>
+                <a:latin typeface="Arial" panose="020B0604020202020204" pitchFamily="34" charset="0"/>
+              </a:rPr>
+              <a:t>, </a:t>
+            </a:r>
+            <a:r>
+              <a:rPr kumimoji="0" lang="en-US" altLang="en-US" sz="1000" b="0" i="1" u="none" strike="noStrike" cap="none" normalizeH="0" baseline="0" dirty="0">
+                <a:ln>
+                  <a:noFill/>
+                </a:ln>
+                <a:solidFill>
+                  <a:schemeClr val="tx1"/>
+                </a:solidFill>
+                <a:effectLst/>
+                <a:latin typeface="Arial" panose="020B0604020202020204" pitchFamily="34" charset="0"/>
+              </a:rPr>
+              <a:t>About to Sleep</a:t>
+            </a:r>
+            <a:r>
+              <a:rPr kumimoji="0" lang="en-US" altLang="en-US" sz="1000" b="0" i="0" u="none" strike="noStrike" cap="none" normalizeH="0" baseline="0" dirty="0">
+                <a:ln>
+                  <a:noFill/>
+                </a:ln>
+                <a:solidFill>
+                  <a:schemeClr val="tx1"/>
+                </a:solidFill>
+                <a:effectLst/>
+                <a:latin typeface="Arial" panose="020B0604020202020204" pitchFamily="34" charset="0"/>
+              </a:rPr>
+              <a:t>) average </a:t>
+            </a:r>
+            <a:r>
+              <a:rPr kumimoji="0" lang="en-US" altLang="en-US" sz="1000" b="1" i="0" u="none" strike="noStrike" cap="none" normalizeH="0" baseline="0" dirty="0">
+                <a:ln>
+                  <a:noFill/>
+                </a:ln>
+                <a:solidFill>
+                  <a:schemeClr val="tx1"/>
+                </a:solidFill>
+                <a:effectLst/>
+                <a:latin typeface="Arial" panose="020B0604020202020204" pitchFamily="34" charset="0"/>
+              </a:rPr>
+              <a:t>55–57</a:t>
+            </a:r>
+            <a:endParaRPr kumimoji="0" lang="en-US" altLang="en-US" sz="1000" b="0" i="0" u="none" strike="noStrike" cap="none" normalizeH="0" baseline="0" dirty="0">
+              <a:ln>
+                <a:noFill/>
+              </a:ln>
+              <a:solidFill>
+                <a:schemeClr val="tx1"/>
+              </a:solidFill>
+              <a:effectLst/>
+              <a:latin typeface="Arial" panose="020B0604020202020204" pitchFamily="34" charset="0"/>
+            </a:endParaRPr>
+          </a:p>
+          <a:p>
+            <a:pPr marL="0" marR="0" lvl="0" indent="0" algn="l" defTabSz="914400" rtl="0" eaLnBrk="0" fontAlgn="base" latinLnBrk="0" hangingPunct="0">
+              <a:lnSpc>
+                <a:spcPct val="100000"/>
+              </a:lnSpc>
+              <a:spcBef>
+                <a:spcPct val="0"/>
+              </a:spcBef>
+              <a:spcAft>
+                <a:spcPct val="0"/>
+              </a:spcAft>
+              <a:buClrTx/>
+              <a:buSzTx/>
+              <a:buFontTx/>
+              <a:buNone/>
+              <a:tabLst/>
+            </a:pPr>
+            <a:r>
+              <a:rPr kumimoji="0" lang="en-US" altLang="en-US" sz="1000" b="1" i="0" u="none" strike="noStrike" cap="none" normalizeH="0" baseline="0" dirty="0">
+                <a:ln>
+                  <a:noFill/>
+                </a:ln>
+                <a:solidFill>
+                  <a:schemeClr val="tx1"/>
+                </a:solidFill>
+                <a:effectLst/>
+                <a:latin typeface="Arial" panose="020B0604020202020204" pitchFamily="34" charset="0"/>
+              </a:rPr>
+              <a:t>Recommendation</a:t>
+            </a:r>
+            <a:r>
+              <a:rPr kumimoji="0" lang="en-US" altLang="en-US" sz="1000" b="0" i="0" u="none" strike="noStrike" cap="none" normalizeH="0" baseline="0" dirty="0">
+                <a:ln>
+                  <a:noFill/>
+                </a:ln>
+                <a:solidFill>
+                  <a:schemeClr val="tx1"/>
+                </a:solidFill>
+                <a:effectLst/>
+                <a:latin typeface="Arial" panose="020B0604020202020204" pitchFamily="34" charset="0"/>
+              </a:rPr>
+              <a:t>:</a:t>
+            </a:r>
+          </a:p>
+          <a:p>
+            <a:pPr marL="0" marR="0" lvl="0" indent="0" algn="l" defTabSz="914400" rtl="0" eaLnBrk="0" fontAlgn="base" latinLnBrk="0" hangingPunct="0">
+              <a:lnSpc>
+                <a:spcPct val="100000"/>
+              </a:lnSpc>
+              <a:spcBef>
+                <a:spcPct val="0"/>
+              </a:spcBef>
+              <a:spcAft>
+                <a:spcPct val="0"/>
+              </a:spcAft>
+              <a:buClrTx/>
+              <a:buSzTx/>
+              <a:buFontTx/>
               <a:buChar char="•"/>
+              <a:tabLst/>
             </a:pPr>
             <a:r>
-              <a:rPr lang="en-US" sz="900" b="1" dirty="0"/>
-              <a:t>Unclassified</a:t>
-            </a:r>
-            <a:r>
-              <a:rPr lang="en-US" sz="900" dirty="0"/>
-              <a:t>: High % unknown users (1.32%)</a:t>
-            </a:r>
-          </a:p>
-          <a:p>
-            <a:pPr>
-              <a:buFont typeface="Arial" panose="020B0604020202020204" pitchFamily="34" charset="0"/>
+              <a:rPr kumimoji="0" lang="en-US" altLang="en-US" sz="1000" b="0" i="0" u="none" strike="noStrike" cap="none" normalizeH="0" baseline="0" dirty="0">
+                <a:ln>
+                  <a:noFill/>
+                </a:ln>
+                <a:solidFill>
+                  <a:schemeClr val="tx1"/>
+                </a:solidFill>
+                <a:effectLst/>
+                <a:latin typeface="Arial" panose="020B0604020202020204" pitchFamily="34" charset="0"/>
+              </a:rPr>
+              <a:t>Use </a:t>
+            </a:r>
+            <a:r>
+              <a:rPr kumimoji="0" lang="en-US" altLang="en-US" sz="1000" b="1" i="0" u="none" strike="noStrike" cap="none" normalizeH="0" baseline="0" dirty="0">
+                <a:ln>
+                  <a:noFill/>
+                </a:ln>
+                <a:solidFill>
+                  <a:schemeClr val="tx1"/>
+                </a:solidFill>
+                <a:effectLst/>
+                <a:latin typeface="Arial" panose="020B0604020202020204" pitchFamily="34" charset="0"/>
+              </a:rPr>
+              <a:t>age-targeted messaging</a:t>
+            </a:r>
+            <a:r>
+              <a:rPr kumimoji="0" lang="en-US" altLang="en-US" sz="1000" b="0" i="0" u="none" strike="noStrike" cap="none" normalizeH="0" baseline="0" dirty="0">
+                <a:ln>
+                  <a:noFill/>
+                </a:ln>
+                <a:solidFill>
+                  <a:schemeClr val="tx1"/>
+                </a:solidFill>
+                <a:effectLst/>
+                <a:latin typeface="Arial" panose="020B0604020202020204" pitchFamily="34" charset="0"/>
+              </a:rPr>
+              <a:t>:</a:t>
+            </a:r>
+          </a:p>
+          <a:p>
+            <a:pPr marL="457200" marR="0" lvl="1" indent="0" algn="l" defTabSz="914400" rtl="0" eaLnBrk="0" fontAlgn="base" latinLnBrk="0" hangingPunct="0">
+              <a:lnSpc>
+                <a:spcPct val="100000"/>
+              </a:lnSpc>
+              <a:spcBef>
+                <a:spcPct val="0"/>
+              </a:spcBef>
+              <a:spcAft>
+                <a:spcPct val="0"/>
+              </a:spcAft>
+              <a:buClrTx/>
+              <a:buSzTx/>
+              <a:buFontTx/>
               <a:buChar char="•"/>
+              <a:tabLst/>
             </a:pPr>
             <a:r>
-              <a:rPr lang="en-US" sz="900" b="1" dirty="0"/>
-              <a:t>Insight</a:t>
-            </a:r>
-            <a:r>
-              <a:rPr lang="en-US" sz="900" dirty="0"/>
-              <a:t>: Only worth pursuing with tailored recovery tactics if CAC (customer acquisition cost) is low.</a:t>
-            </a:r>
+              <a:rPr kumimoji="0" lang="en-US" altLang="en-US" sz="1000" b="0" i="0" u="none" strike="noStrike" cap="none" normalizeH="0" baseline="0" dirty="0">
+                <a:ln>
+                  <a:noFill/>
+                </a:ln>
+                <a:solidFill>
+                  <a:schemeClr val="tx1"/>
+                </a:solidFill>
+                <a:effectLst/>
+                <a:latin typeface="Arial" panose="020B0604020202020204" pitchFamily="34" charset="0"/>
+              </a:rPr>
+              <a:t>Modern, mobile-first formats for younger segments.</a:t>
+            </a:r>
+          </a:p>
+          <a:p>
+            <a:pPr marL="457200" marR="0" lvl="1" indent="0" algn="l" defTabSz="914400" rtl="0" eaLnBrk="0" fontAlgn="base" latinLnBrk="0" hangingPunct="0">
+              <a:lnSpc>
+                <a:spcPct val="100000"/>
+              </a:lnSpc>
+              <a:spcBef>
+                <a:spcPct val="0"/>
+              </a:spcBef>
+              <a:spcAft>
+                <a:spcPct val="0"/>
+              </a:spcAft>
+              <a:buClrTx/>
+              <a:buSzTx/>
+              <a:buFontTx/>
+              <a:buChar char="•"/>
+              <a:tabLst/>
+            </a:pPr>
+            <a:r>
+              <a:rPr kumimoji="0" lang="en-US" altLang="en-US" sz="1000" b="0" i="0" u="none" strike="noStrike" cap="none" normalizeH="0" baseline="0" dirty="0">
+                <a:ln>
+                  <a:noFill/>
+                </a:ln>
+                <a:solidFill>
+                  <a:schemeClr val="tx1"/>
+                </a:solidFill>
+                <a:effectLst/>
+                <a:latin typeface="Arial" panose="020B0604020202020204" pitchFamily="34" charset="0"/>
+              </a:rPr>
+              <a:t>Simpler, more trustworthy or legacy branding for older segments.</a:t>
+            </a:r>
+          </a:p>
+          <a:p>
+            <a:pPr marL="0" marR="0" lvl="0" indent="0" algn="l" defTabSz="914400" rtl="0" eaLnBrk="0" fontAlgn="base" latinLnBrk="0" hangingPunct="0">
+              <a:lnSpc>
+                <a:spcPct val="100000"/>
+              </a:lnSpc>
+              <a:spcBef>
+                <a:spcPct val="0"/>
+              </a:spcBef>
+              <a:spcAft>
+                <a:spcPct val="0"/>
+              </a:spcAft>
+              <a:buClrTx/>
+              <a:buSzTx/>
+              <a:buFontTx/>
+              <a:buNone/>
+              <a:tabLst/>
+            </a:pPr>
+            <a:endParaRPr kumimoji="0" lang="en-US" altLang="en-US" sz="1000" b="0" i="0" u="none" strike="noStrike" cap="none" normalizeH="0" baseline="0" dirty="0">
+              <a:ln>
+                <a:noFill/>
+              </a:ln>
+              <a:solidFill>
+                <a:schemeClr val="tx1"/>
+              </a:solidFill>
+              <a:effectLst/>
+              <a:latin typeface="Arial" panose="020B0604020202020204" pitchFamily="34" charset="0"/>
+            </a:endParaRPr>
+          </a:p>
+        </p:txBody>
+      </p:sp>
+      <p:sp>
+        <p:nvSpPr>
+          <p:cNvPr id="128" name="Rectangle 19">
+            <a:extLst>
+              <a:ext uri="{FF2B5EF4-FFF2-40B4-BE49-F238E27FC236}">
+                <a16:creationId xmlns:a16="http://schemas.microsoft.com/office/drawing/2014/main" id="{E48602A8-8E13-D4B9-3B5E-59E12A34C057}"/>
+              </a:ext>
+            </a:extLst>
+          </p:cNvPr>
+          <p:cNvSpPr>
+            <a:spLocks noChangeArrowheads="1"/>
+          </p:cNvSpPr>
+          <p:nvPr/>
+        </p:nvSpPr>
+        <p:spPr bwMode="auto">
+          <a:xfrm>
+            <a:off x="3355842" y="4134550"/>
+            <a:ext cx="5586786" cy="1169551"/>
+          </a:xfrm>
+          <a:prstGeom prst="rect">
+            <a:avLst/>
+          </a:prstGeom>
+          <a:noFill/>
+          <a:ln>
+            <a:noFill/>
+          </a:ln>
+          <a:effectLst/>
+          <a:extLst>
+            <a:ext uri="{909E8E84-426E-40DD-AFC4-6F175D3DCCD1}">
+              <a14:hiddenFill xmlns:a14="http://schemas.microsoft.com/office/drawing/2010/main">
+                <a:solidFill>
+                  <a:schemeClr val="accent1"/>
+                </a:solidFill>
+              </a14:hiddenFill>
+            </a:ext>
+            <a:ext uri="{91240B29-F687-4F45-9708-019B960494DF}">
+              <a14:hiddenLine xmlns:a14="http://schemas.microsoft.com/office/drawing/2010/main" w="9525">
+                <a:solidFill>
+                  <a:schemeClr val="tx1"/>
+                </a:solidFill>
+                <a:miter lim="800000"/>
+                <a:headEnd/>
+                <a:tailEnd/>
+              </a14:hiddenLine>
+            </a:ext>
+            <a:ext uri="{AF507438-7753-43E0-B8FC-AC1667EBCBE1}">
+              <a14:hiddenEffects xmlns:a14="http://schemas.microsoft.com/office/drawing/2010/main">
+                <a:effectLst>
+                  <a:outerShdw dist="35921" dir="2700000" algn="ctr" rotWithShape="0">
+                    <a:schemeClr val="bg2"/>
+                  </a:outerShdw>
+                </a:effectLst>
+              </a14:hiddenEffects>
+            </a:ext>
+          </a:extLst>
+        </p:spPr>
+        <p:txBody>
+          <a:bodyPr vert="horz" wrap="none" lIns="91440" tIns="45720" rIns="91440" bIns="45720" numCol="1" anchor="ctr" anchorCtr="0" compatLnSpc="1">
+            <a:prstTxWarp prst="textNoShape">
+              <a:avLst/>
+            </a:prstTxWarp>
+            <a:spAutoFit/>
+          </a:bodyPr>
+          <a:lstStyle/>
+          <a:p>
+            <a:pPr marL="0" marR="0" lvl="0" indent="0" algn="l" defTabSz="914400" rtl="0" eaLnBrk="0" fontAlgn="base" latinLnBrk="0" hangingPunct="0">
+              <a:lnSpc>
+                <a:spcPct val="100000"/>
+              </a:lnSpc>
+              <a:spcBef>
+                <a:spcPct val="0"/>
+              </a:spcBef>
+              <a:spcAft>
+                <a:spcPct val="0"/>
+              </a:spcAft>
+              <a:buClrTx/>
+              <a:buSzTx/>
+              <a:buFontTx/>
+              <a:buNone/>
+              <a:tabLst/>
+            </a:pPr>
+            <a:r>
+              <a:rPr kumimoji="0" lang="en-US" altLang="en-US" sz="1000" b="1" i="0" u="none" strike="noStrike" cap="none" normalizeH="0" baseline="0" dirty="0">
+                <a:ln>
+                  <a:noFill/>
+                </a:ln>
+                <a:solidFill>
+                  <a:schemeClr val="tx1"/>
+                </a:solidFill>
+                <a:effectLst/>
+                <a:latin typeface="Arial" panose="020B0604020202020204" pitchFamily="34" charset="0"/>
+              </a:rPr>
+              <a:t>4. 🌐 Channel Preferences</a:t>
+            </a:r>
+          </a:p>
+          <a:p>
+            <a:pPr marL="0" marR="0" lvl="0" indent="0" algn="l" defTabSz="914400" rtl="0" eaLnBrk="0" fontAlgn="base" latinLnBrk="0" hangingPunct="0">
+              <a:lnSpc>
+                <a:spcPct val="100000"/>
+              </a:lnSpc>
+              <a:spcBef>
+                <a:spcPct val="0"/>
+              </a:spcBef>
+              <a:spcAft>
+                <a:spcPct val="0"/>
+              </a:spcAft>
+              <a:buClrTx/>
+              <a:buSzTx/>
+              <a:buFontTx/>
+              <a:buChar char="•"/>
+              <a:tabLst/>
+            </a:pPr>
+            <a:r>
+              <a:rPr kumimoji="0" lang="en-US" altLang="en-US" sz="1000" b="0" i="0" u="none" strike="noStrike" cap="none" normalizeH="0" baseline="0" dirty="0">
+                <a:ln>
+                  <a:noFill/>
+                </a:ln>
+                <a:solidFill>
+                  <a:schemeClr val="tx1"/>
+                </a:solidFill>
+                <a:effectLst/>
+                <a:latin typeface="Arial" panose="020B0604020202020204" pitchFamily="34" charset="0"/>
+              </a:rPr>
+              <a:t>Segments like </a:t>
+            </a:r>
+            <a:r>
+              <a:rPr kumimoji="0" lang="en-US" altLang="en-US" sz="1000" b="1" i="0" u="none" strike="noStrike" cap="none" normalizeH="0" baseline="0" dirty="0">
+                <a:ln>
+                  <a:noFill/>
+                </a:ln>
+                <a:solidFill>
+                  <a:schemeClr val="tx1"/>
+                </a:solidFill>
+                <a:effectLst/>
+                <a:latin typeface="Arial" panose="020B0604020202020204" pitchFamily="34" charset="0"/>
+              </a:rPr>
+              <a:t>Champions</a:t>
+            </a:r>
+            <a:r>
+              <a:rPr kumimoji="0" lang="en-US" altLang="en-US" sz="1000" b="0" i="0" u="none" strike="noStrike" cap="none" normalizeH="0" baseline="0" dirty="0">
+                <a:ln>
+                  <a:noFill/>
+                </a:ln>
+                <a:solidFill>
+                  <a:schemeClr val="tx1"/>
+                </a:solidFill>
+                <a:effectLst/>
+                <a:latin typeface="Arial" panose="020B0604020202020204" pitchFamily="34" charset="0"/>
+              </a:rPr>
+              <a:t>, </a:t>
+            </a:r>
+            <a:r>
+              <a:rPr kumimoji="0" lang="en-US" altLang="en-US" sz="1000" b="1" i="0" u="none" strike="noStrike" cap="none" normalizeH="0" baseline="0" dirty="0">
+                <a:ln>
+                  <a:noFill/>
+                </a:ln>
+                <a:solidFill>
+                  <a:schemeClr val="tx1"/>
+                </a:solidFill>
+                <a:effectLst/>
+                <a:latin typeface="Arial" panose="020B0604020202020204" pitchFamily="34" charset="0"/>
+              </a:rPr>
+              <a:t>Potential Loyalist</a:t>
+            </a:r>
+            <a:r>
+              <a:rPr kumimoji="0" lang="en-US" altLang="en-US" sz="1000" b="0" i="0" u="none" strike="noStrike" cap="none" normalizeH="0" baseline="0" dirty="0">
+                <a:ln>
+                  <a:noFill/>
+                </a:ln>
+                <a:solidFill>
+                  <a:schemeClr val="tx1"/>
+                </a:solidFill>
+                <a:effectLst/>
+                <a:latin typeface="Arial" panose="020B0604020202020204" pitchFamily="34" charset="0"/>
+              </a:rPr>
+              <a:t>, and </a:t>
+            </a:r>
+            <a:r>
+              <a:rPr kumimoji="0" lang="en-US" altLang="en-US" sz="1000" b="1" i="0" u="none" strike="noStrike" cap="none" normalizeH="0" baseline="0" dirty="0">
+                <a:ln>
+                  <a:noFill/>
+                </a:ln>
+                <a:solidFill>
+                  <a:schemeClr val="tx1"/>
+                </a:solidFill>
+                <a:effectLst/>
+                <a:latin typeface="Arial" panose="020B0604020202020204" pitchFamily="34" charset="0"/>
+              </a:rPr>
+              <a:t>Lost</a:t>
+            </a:r>
+            <a:r>
+              <a:rPr kumimoji="0" lang="en-US" altLang="en-US" sz="1000" b="0" i="0" u="none" strike="noStrike" cap="none" normalizeH="0" baseline="0" dirty="0">
+                <a:ln>
+                  <a:noFill/>
+                </a:ln>
+                <a:solidFill>
+                  <a:schemeClr val="tx1"/>
+                </a:solidFill>
+                <a:effectLst/>
+                <a:latin typeface="Arial" panose="020B0604020202020204" pitchFamily="34" charset="0"/>
+              </a:rPr>
+              <a:t> have </a:t>
+            </a:r>
+            <a:r>
+              <a:rPr kumimoji="0" lang="en-US" altLang="en-US" sz="1000" b="1" i="0" u="none" strike="noStrike" cap="none" normalizeH="0" baseline="0" dirty="0">
+                <a:ln>
+                  <a:noFill/>
+                </a:ln>
+                <a:solidFill>
+                  <a:schemeClr val="tx1"/>
+                </a:solidFill>
+                <a:effectLst/>
+                <a:latin typeface="Arial" panose="020B0604020202020204" pitchFamily="34" charset="0"/>
+              </a:rPr>
+              <a:t>higher online channel usage</a:t>
+            </a:r>
+            <a:r>
+              <a:rPr kumimoji="0" lang="en-US" altLang="en-US" sz="1000" b="0" i="0" u="none" strike="noStrike" cap="none" normalizeH="0" baseline="0" dirty="0">
+                <a:ln>
+                  <a:noFill/>
+                </a:ln>
+                <a:solidFill>
+                  <a:schemeClr val="tx1"/>
+                </a:solidFill>
+                <a:effectLst/>
+                <a:latin typeface="Arial" panose="020B0604020202020204" pitchFamily="34" charset="0"/>
+              </a:rPr>
+              <a:t>.</a:t>
+            </a:r>
+          </a:p>
+          <a:p>
+            <a:pPr marL="0" marR="0" lvl="0" indent="0" algn="l" defTabSz="914400" rtl="0" eaLnBrk="0" fontAlgn="base" latinLnBrk="0" hangingPunct="0">
+              <a:lnSpc>
+                <a:spcPct val="100000"/>
+              </a:lnSpc>
+              <a:spcBef>
+                <a:spcPct val="0"/>
+              </a:spcBef>
+              <a:spcAft>
+                <a:spcPct val="0"/>
+              </a:spcAft>
+              <a:buClrTx/>
+              <a:buSzTx/>
+              <a:buFontTx/>
+              <a:buChar char="•"/>
+              <a:tabLst/>
+            </a:pPr>
+            <a:r>
+              <a:rPr kumimoji="0" lang="en-US" altLang="en-US" sz="1000" b="0" i="0" u="none" strike="noStrike" cap="none" normalizeH="0" baseline="0" dirty="0">
+                <a:ln>
+                  <a:noFill/>
+                </a:ln>
+                <a:solidFill>
+                  <a:schemeClr val="tx1"/>
+                </a:solidFill>
+                <a:effectLst/>
+                <a:latin typeface="Arial" panose="020B0604020202020204" pitchFamily="34" charset="0"/>
+              </a:rPr>
+              <a:t>Segments like </a:t>
+            </a:r>
+            <a:r>
+              <a:rPr kumimoji="0" lang="en-US" altLang="en-US" sz="1000" b="1" i="0" u="none" strike="noStrike" cap="none" normalizeH="0" baseline="0" dirty="0">
+                <a:ln>
+                  <a:noFill/>
+                </a:ln>
+                <a:solidFill>
+                  <a:schemeClr val="tx1"/>
+                </a:solidFill>
+                <a:effectLst/>
+                <a:latin typeface="Arial" panose="020B0604020202020204" pitchFamily="34" charset="0"/>
+              </a:rPr>
+              <a:t>Hibernating</a:t>
+            </a:r>
+            <a:r>
+              <a:rPr kumimoji="0" lang="en-US" altLang="en-US" sz="1000" b="0" i="0" u="none" strike="noStrike" cap="none" normalizeH="0" baseline="0" dirty="0">
+                <a:ln>
+                  <a:noFill/>
+                </a:ln>
+                <a:solidFill>
+                  <a:schemeClr val="tx1"/>
+                </a:solidFill>
+                <a:effectLst/>
+                <a:latin typeface="Arial" panose="020B0604020202020204" pitchFamily="34" charset="0"/>
+              </a:rPr>
+              <a:t> and </a:t>
+            </a:r>
+            <a:r>
+              <a:rPr kumimoji="0" lang="en-US" altLang="en-US" sz="1000" b="1" i="0" u="none" strike="noStrike" cap="none" normalizeH="0" baseline="0" dirty="0">
+                <a:ln>
+                  <a:noFill/>
+                </a:ln>
+                <a:solidFill>
+                  <a:schemeClr val="tx1"/>
+                </a:solidFill>
+                <a:effectLst/>
+                <a:latin typeface="Arial" panose="020B0604020202020204" pitchFamily="34" charset="0"/>
+              </a:rPr>
+              <a:t>Can’t Lose Them</a:t>
+            </a:r>
+            <a:r>
+              <a:rPr kumimoji="0" lang="en-US" altLang="en-US" sz="1000" b="0" i="0" u="none" strike="noStrike" cap="none" normalizeH="0" baseline="0" dirty="0">
+                <a:ln>
+                  <a:noFill/>
+                </a:ln>
+                <a:solidFill>
+                  <a:schemeClr val="tx1"/>
+                </a:solidFill>
+                <a:effectLst/>
+                <a:latin typeface="Arial" panose="020B0604020202020204" pitchFamily="34" charset="0"/>
+              </a:rPr>
+              <a:t> are more offline-oriented.</a:t>
+            </a:r>
+          </a:p>
+          <a:p>
+            <a:pPr marL="0" marR="0" lvl="0" indent="0" algn="l" defTabSz="914400" rtl="0" eaLnBrk="0" fontAlgn="base" latinLnBrk="0" hangingPunct="0">
+              <a:lnSpc>
+                <a:spcPct val="100000"/>
+              </a:lnSpc>
+              <a:spcBef>
+                <a:spcPct val="0"/>
+              </a:spcBef>
+              <a:spcAft>
+                <a:spcPct val="0"/>
+              </a:spcAft>
+              <a:buClrTx/>
+              <a:buSzTx/>
+              <a:buFontTx/>
+              <a:buNone/>
+              <a:tabLst/>
+            </a:pPr>
+            <a:r>
+              <a:rPr kumimoji="0" lang="en-US" altLang="en-US" sz="1000" b="1" i="0" u="none" strike="noStrike" cap="none" normalizeH="0" baseline="0" dirty="0">
+                <a:ln>
+                  <a:noFill/>
+                </a:ln>
+                <a:solidFill>
+                  <a:schemeClr val="tx1"/>
+                </a:solidFill>
+                <a:effectLst/>
+                <a:latin typeface="Arial" panose="020B0604020202020204" pitchFamily="34" charset="0"/>
+              </a:rPr>
+              <a:t>Recommendation</a:t>
+            </a:r>
+            <a:r>
+              <a:rPr kumimoji="0" lang="en-US" altLang="en-US" sz="1000" b="0" i="0" u="none" strike="noStrike" cap="none" normalizeH="0" baseline="0" dirty="0">
+                <a:ln>
+                  <a:noFill/>
+                </a:ln>
+                <a:solidFill>
+                  <a:schemeClr val="tx1"/>
+                </a:solidFill>
+                <a:effectLst/>
+                <a:latin typeface="Arial" panose="020B0604020202020204" pitchFamily="34" charset="0"/>
+              </a:rPr>
+              <a:t>:</a:t>
+            </a:r>
+          </a:p>
+          <a:p>
+            <a:pPr marL="0" marR="0" lvl="0" indent="0" algn="l" defTabSz="914400" rtl="0" eaLnBrk="0" fontAlgn="base" latinLnBrk="0" hangingPunct="0">
+              <a:lnSpc>
+                <a:spcPct val="100000"/>
+              </a:lnSpc>
+              <a:spcBef>
+                <a:spcPct val="0"/>
+              </a:spcBef>
+              <a:spcAft>
+                <a:spcPct val="0"/>
+              </a:spcAft>
+              <a:buClrTx/>
+              <a:buSzTx/>
+              <a:buFontTx/>
+              <a:buChar char="•"/>
+              <a:tabLst/>
+            </a:pPr>
+            <a:r>
+              <a:rPr kumimoji="0" lang="en-US" altLang="en-US" sz="1000" b="1" i="0" u="none" strike="noStrike" cap="none" normalizeH="0" baseline="0" dirty="0">
+                <a:ln>
+                  <a:noFill/>
+                </a:ln>
+                <a:solidFill>
+                  <a:schemeClr val="tx1"/>
+                </a:solidFill>
+                <a:effectLst/>
+                <a:latin typeface="Arial" panose="020B0604020202020204" pitchFamily="34" charset="0"/>
+              </a:rPr>
+              <a:t>Invest in digital ads and email marketing</a:t>
+            </a:r>
+            <a:r>
+              <a:rPr kumimoji="0" lang="en-US" altLang="en-US" sz="1000" b="0" i="0" u="none" strike="noStrike" cap="none" normalizeH="0" baseline="0" dirty="0">
+                <a:ln>
+                  <a:noFill/>
+                </a:ln>
+                <a:solidFill>
+                  <a:schemeClr val="tx1"/>
+                </a:solidFill>
+                <a:effectLst/>
+                <a:latin typeface="Arial" panose="020B0604020202020204" pitchFamily="34" charset="0"/>
+              </a:rPr>
+              <a:t> for online-dominant groups.</a:t>
+            </a:r>
+          </a:p>
+          <a:p>
+            <a:pPr marL="0" marR="0" lvl="0" indent="0" algn="l" defTabSz="914400" rtl="0" eaLnBrk="0" fontAlgn="base" latinLnBrk="0" hangingPunct="0">
+              <a:lnSpc>
+                <a:spcPct val="100000"/>
+              </a:lnSpc>
+              <a:spcBef>
+                <a:spcPct val="0"/>
+              </a:spcBef>
+              <a:spcAft>
+                <a:spcPct val="0"/>
+              </a:spcAft>
+              <a:buClrTx/>
+              <a:buSzTx/>
+              <a:buFontTx/>
+              <a:buChar char="•"/>
+              <a:tabLst/>
+            </a:pPr>
+            <a:r>
+              <a:rPr kumimoji="0" lang="en-US" altLang="en-US" sz="1000" b="1" i="0" u="none" strike="noStrike" cap="none" normalizeH="0" baseline="0" dirty="0">
+                <a:ln>
+                  <a:noFill/>
+                </a:ln>
+                <a:solidFill>
+                  <a:schemeClr val="tx1"/>
+                </a:solidFill>
+                <a:effectLst/>
+                <a:latin typeface="Arial" panose="020B0604020202020204" pitchFamily="34" charset="0"/>
+              </a:rPr>
+              <a:t>Leverage phone, direct mail, or in-store experience</a:t>
+            </a:r>
+            <a:r>
+              <a:rPr kumimoji="0" lang="en-US" altLang="en-US" sz="1000" b="0" i="0" u="none" strike="noStrike" cap="none" normalizeH="0" baseline="0" dirty="0">
+                <a:ln>
+                  <a:noFill/>
+                </a:ln>
+                <a:solidFill>
+                  <a:schemeClr val="tx1"/>
+                </a:solidFill>
+                <a:effectLst/>
+                <a:latin typeface="Arial" panose="020B0604020202020204" pitchFamily="34" charset="0"/>
+              </a:rPr>
+              <a:t> for offline groups.</a:t>
+            </a:r>
+          </a:p>
+          <a:p>
+            <a:pPr marL="0" marR="0" lvl="0" indent="0" algn="l" defTabSz="914400" rtl="0" eaLnBrk="0" fontAlgn="base" latinLnBrk="0" hangingPunct="0">
+              <a:lnSpc>
+                <a:spcPct val="100000"/>
+              </a:lnSpc>
+              <a:spcBef>
+                <a:spcPct val="0"/>
+              </a:spcBef>
+              <a:spcAft>
+                <a:spcPct val="0"/>
+              </a:spcAft>
+              <a:buClrTx/>
+              <a:buSzTx/>
+              <a:buFontTx/>
+              <a:buNone/>
+              <a:tabLst/>
+            </a:pPr>
+            <a:endParaRPr kumimoji="0" lang="en-US" altLang="en-US" sz="1000" b="0" i="0" u="none" strike="noStrike" cap="none" normalizeH="0" baseline="0" dirty="0">
+              <a:ln>
+                <a:noFill/>
+              </a:ln>
+              <a:solidFill>
+                <a:schemeClr val="tx1"/>
+              </a:solidFill>
+              <a:effectLst/>
+              <a:latin typeface="Arial" panose="020B0604020202020204" pitchFamily="34" charset="0"/>
+            </a:endParaRPr>
           </a:p>
         </p:txBody>
       </p:sp>
@@ -16791,7 +18505,7 @@
           </a:ln>
           <a:extLst>
             <a:ext uri="{C572A759-6A51-4108-AA02-DFA0A04FC94B}">
-              <ma14:wrappingTextBoxFlag xmlns="" xmlns:ma14="http://schemas.microsoft.com/office/mac/drawingml/2011/main" val="1"/>
+              <ma14:wrappingTextBoxFlag xmlns:ma14="http://schemas.microsoft.com/office/mac/drawingml/2011/main" xmlns="" val="1"/>
             </a:ext>
           </a:extLst>
         </p:spPr>
@@ -16847,7 +18561,7 @@
           </a:ln>
           <a:extLst>
             <a:ext uri="{C572A759-6A51-4108-AA02-DFA0A04FC94B}">
-              <ma14:wrappingTextBoxFlag xmlns="" xmlns:ma14="http://schemas.microsoft.com/office/mac/drawingml/2011/main" val="1"/>
+              <ma14:wrappingTextBoxFlag xmlns:ma14="http://schemas.microsoft.com/office/mac/drawingml/2011/main" xmlns="" val="1"/>
             </a:ext>
           </a:extLst>
         </p:spPr>
@@ -16905,7 +18619,7 @@
           </a:ln>
           <a:extLst>
             <a:ext uri="{C572A759-6A51-4108-AA02-DFA0A04FC94B}">
-              <ma14:wrappingTextBoxFlag xmlns="" xmlns:ma14="http://schemas.microsoft.com/office/mac/drawingml/2011/main" val="1"/>
+              <ma14:wrappingTextBoxFlag xmlns:ma14="http://schemas.microsoft.com/office/mac/drawingml/2011/main" xmlns="" val="1"/>
             </a:ext>
           </a:extLst>
         </p:spPr>
